--- a/Lab1/Lab1 Workbook-Tool Installation.pptx
+++ b/Lab1/Lab1 Workbook-Tool Installation.pptx
@@ -15556,13 +15556,13 @@
           <a:p>
             <a:r>
               <a:rPr lang="en-US" dirty="0"/>
-              <a:t>Verilog folder:(</a:t>
+              <a:t>Verilog folder: (</a:t>
             </a:r>
             <a:r>
               <a:rPr lang="en-US" dirty="0">
                 <a:hlinkClick r:id="rId2"/>
               </a:rPr>
-              <a:t>https://github.com/roo-nju/hkust-soc-lab/Lab1/Verilog</a:t>
+              <a:t>https://github.com/roo-nju/hkust-soc-lab/tree/main/Lab1/Verilog</a:t>
             </a:r>
             <a:r>
               <a:rPr lang="en-US" dirty="0"/>

--- a/Lab1/Lab1 Workbook-Tool Installation.pptx
+++ b/Lab1/Lab1 Workbook-Tool Installation.pptx
@@ -306,6 +306,30 @@
             <pc:docMk/>
             <pc:sldMk cId="1903873421" sldId="386"/>
             <ac:spMk id="3" creationId="{D211EFF1-8201-B1B3-154C-558F5F3622CD}"/>
+          </ac:spMkLst>
+        </pc:spChg>
+      </pc:sldChg>
+    </pc:docChg>
+  </pc:docChgLst>
+  <pc:docChgLst>
+    <pc:chgData name="WU Yongkun" userId="9f03f4a5-7e7a-4a26-ba55-64643d70ff11" providerId="ADAL" clId="{C74CEAD8-BC21-4E10-A576-679945636F36}"/>
+    <pc:docChg chg="modSld">
+      <pc:chgData name="WU Yongkun" userId="9f03f4a5-7e7a-4a26-ba55-64643d70ff11" providerId="ADAL" clId="{C74CEAD8-BC21-4E10-A576-679945636F36}" dt="2025-02-01T03:25:13.738" v="1" actId="20577"/>
+      <pc:docMkLst>
+        <pc:docMk/>
+      </pc:docMkLst>
+      <pc:sldChg chg="modSp mod">
+        <pc:chgData name="WU Yongkun" userId="9f03f4a5-7e7a-4a26-ba55-64643d70ff11" providerId="ADAL" clId="{C74CEAD8-BC21-4E10-A576-679945636F36}" dt="2025-02-01T03:25:13.738" v="1" actId="20577"/>
+        <pc:sldMkLst>
+          <pc:docMk/>
+          <pc:sldMk cId="304963755" sldId="351"/>
+        </pc:sldMkLst>
+        <pc:spChg chg="mod">
+          <ac:chgData name="WU Yongkun" userId="9f03f4a5-7e7a-4a26-ba55-64643d70ff11" providerId="ADAL" clId="{C74CEAD8-BC21-4E10-A576-679945636F36}" dt="2025-02-01T03:25:13.738" v="1" actId="20577"/>
+          <ac:spMkLst>
+            <pc:docMk/>
+            <pc:sldMk cId="304963755" sldId="351"/>
+            <ac:spMk id="7" creationId="{8A279EEE-CD37-F225-BC3E-C6D54E9F43BB}"/>
           </ac:spMkLst>
         </pc:spChg>
       </pc:sldChg>
@@ -15424,13 +15448,7 @@
               <a:rPr lang="en-HK" dirty="0">
                 <a:effectLst/>
               </a:rPr>
-              <a:t>/</a:t>
-            </a:r>
-            <a:r>
-              <a:rPr lang="en-HK">
-                <a:effectLst/>
-              </a:rPr>
-              <a:t>report - </a:t>
+              <a:t>/report - </a:t>
             </a:r>
             <a:r>
               <a:rPr lang="en-HK" dirty="0" err="1">
@@ -15442,8 +15460,17 @@
               <a:rPr lang="en-HK" dirty="0">
                 <a:effectLst/>
               </a:rPr>
-              <a:t> simulation log, synthesis log/resource, timing report, post-synthesis simulation log.</a:t>
+              <a:t> simulation log, synthesis log/resource, </a:t>
             </a:r>
+            <a:r>
+              <a:rPr lang="en-HK">
+                <a:effectLst/>
+              </a:rPr>
+              <a:t>timing report</a:t>
+            </a:r>
+            <a:endParaRPr lang="en-HK" dirty="0">
+              <a:effectLst/>
+            </a:endParaRPr>
           </a:p>
         </p:txBody>
       </p:sp>

--- a/Lab1/Lab1 Workbook-Tool Installation.pptx
+++ b/Lab1/Lab1 Workbook-Tool Installation.pptx
@@ -145,13 +145,37 @@
 <file path=ppt/revisionInfo.xml><?xml version="1.0" encoding="utf-8"?>
 <p1510:revInfo xmlns:a="http://schemas.openxmlformats.org/drawingml/2006/main" xmlns:r="http://schemas.openxmlformats.org/officeDocument/2006/relationships" xmlns:p1510="http://schemas.microsoft.com/office/powerpoint/2015/10/main">
   <p1510:revLst>
-    <p1510:client id="{4FB9C78E-FC5D-4326-955C-77E6C5EFE4E9}" v="4" dt="2025-02-01T02:16:55.122"/>
+    <p1510:client id="{626C6B34-CEA9-B442-A027-C024DA9CE728}" v="194" dt="2025-02-03T10:36:29.291"/>
   </p1510:revLst>
 </p1510:revInfo>
 </file>
 
 <file path=ppt/changesInfos/changesInfo1.xml><?xml version="1.0" encoding="utf-8"?>
 <pc:chgInfo xmlns:a="http://schemas.openxmlformats.org/drawingml/2006/main" xmlns:r="http://schemas.openxmlformats.org/officeDocument/2006/relationships" xmlns:ac="http://schemas.microsoft.com/office/drawing/2013/main/command" xmlns:pc="http://schemas.microsoft.com/office/powerpoint/2013/main/command">
+  <pc:docChgLst>
+    <pc:chgData name="WU Yongkun" userId="9f03f4a5-7e7a-4a26-ba55-64643d70ff11" providerId="ADAL" clId="{C74CEAD8-BC21-4E10-A576-679945636F36}"/>
+    <pc:docChg chg="modSld">
+      <pc:chgData name="WU Yongkun" userId="9f03f4a5-7e7a-4a26-ba55-64643d70ff11" providerId="ADAL" clId="{C74CEAD8-BC21-4E10-A576-679945636F36}" dt="2025-02-01T03:25:13.738" v="1" actId="20577"/>
+      <pc:docMkLst>
+        <pc:docMk/>
+      </pc:docMkLst>
+      <pc:sldChg chg="modSp mod">
+        <pc:chgData name="WU Yongkun" userId="9f03f4a5-7e7a-4a26-ba55-64643d70ff11" providerId="ADAL" clId="{C74CEAD8-BC21-4E10-A576-679945636F36}" dt="2025-02-01T03:25:13.738" v="1" actId="20577"/>
+        <pc:sldMkLst>
+          <pc:docMk/>
+          <pc:sldMk cId="304963755" sldId="351"/>
+        </pc:sldMkLst>
+        <pc:spChg chg="mod">
+          <ac:chgData name="WU Yongkun" userId="9f03f4a5-7e7a-4a26-ba55-64643d70ff11" providerId="ADAL" clId="{C74CEAD8-BC21-4E10-A576-679945636F36}" dt="2025-02-01T03:25:13.738" v="1" actId="20577"/>
+          <ac:spMkLst>
+            <pc:docMk/>
+            <pc:sldMk cId="304963755" sldId="351"/>
+            <ac:spMk id="7" creationId="{8A279EEE-CD37-F225-BC3E-C6D54E9F43BB}"/>
+          </ac:spMkLst>
+        </pc:spChg>
+      </pc:sldChg>
+    </pc:docChg>
+  </pc:docChgLst>
   <pc:docChgLst>
     <pc:chgData name="WU Yongkun" userId="9f03f4a5-7e7a-4a26-ba55-64643d70ff11" providerId="ADAL" clId="{4FB9C78E-FC5D-4326-955C-77E6C5EFE4E9}"/>
     <pc:docChg chg="undo custSel modSld">
@@ -312,24 +336,24 @@
     </pc:docChg>
   </pc:docChgLst>
   <pc:docChgLst>
-    <pc:chgData name="WU Yongkun" userId="9f03f4a5-7e7a-4a26-ba55-64643d70ff11" providerId="ADAL" clId="{C74CEAD8-BC21-4E10-A576-679945636F36}"/>
+    <pc:chgData name="WU Yongkun" userId="9f03f4a5-7e7a-4a26-ba55-64643d70ff11" providerId="ADAL" clId="{626C6B34-CEA9-B442-A027-C024DA9CE728}"/>
     <pc:docChg chg="modSld">
-      <pc:chgData name="WU Yongkun" userId="9f03f4a5-7e7a-4a26-ba55-64643d70ff11" providerId="ADAL" clId="{C74CEAD8-BC21-4E10-A576-679945636F36}" dt="2025-02-01T03:25:13.738" v="1" actId="20577"/>
+      <pc:chgData name="WU Yongkun" userId="9f03f4a5-7e7a-4a26-ba55-64643d70ff11" providerId="ADAL" clId="{626C6B34-CEA9-B442-A027-C024DA9CE728}" dt="2025-02-03T10:36:29.291" v="193" actId="20577"/>
       <pc:docMkLst>
         <pc:docMk/>
       </pc:docMkLst>
       <pc:sldChg chg="modSp mod">
-        <pc:chgData name="WU Yongkun" userId="9f03f4a5-7e7a-4a26-ba55-64643d70ff11" providerId="ADAL" clId="{C74CEAD8-BC21-4E10-A576-679945636F36}" dt="2025-02-01T03:25:13.738" v="1" actId="20577"/>
+        <pc:chgData name="WU Yongkun" userId="9f03f4a5-7e7a-4a26-ba55-64643d70ff11" providerId="ADAL" clId="{626C6B34-CEA9-B442-A027-C024DA9CE728}" dt="2025-02-03T10:36:29.291" v="193" actId="20577"/>
         <pc:sldMkLst>
           <pc:docMk/>
-          <pc:sldMk cId="304963755" sldId="351"/>
+          <pc:sldMk cId="1903873421" sldId="386"/>
         </pc:sldMkLst>
         <pc:spChg chg="mod">
-          <ac:chgData name="WU Yongkun" userId="9f03f4a5-7e7a-4a26-ba55-64643d70ff11" providerId="ADAL" clId="{C74CEAD8-BC21-4E10-A576-679945636F36}" dt="2025-02-01T03:25:13.738" v="1" actId="20577"/>
+          <ac:chgData name="WU Yongkun" userId="9f03f4a5-7e7a-4a26-ba55-64643d70ff11" providerId="ADAL" clId="{626C6B34-CEA9-B442-A027-C024DA9CE728}" dt="2025-02-03T10:36:29.291" v="193" actId="20577"/>
           <ac:spMkLst>
             <pc:docMk/>
-            <pc:sldMk cId="304963755" sldId="351"/>
-            <ac:spMk id="7" creationId="{8A279EEE-CD37-F225-BC3E-C6D54E9F43BB}"/>
+            <pc:sldMk cId="1903873421" sldId="386"/>
+            <ac:spMk id="3" creationId="{D211EFF1-8201-B1B3-154C-558F5F3622CD}"/>
           </ac:spMkLst>
         </pc:spChg>
       </pc:sldChg>
@@ -420,7 +444,7 @@
           <a:p>
             <a:fld id="{80C38B47-C3B7-8443-A58D-8B22D7D22AE0}" type="datetimeFigureOut">
               <a:rPr lang="en-US" smtClean="0"/>
-              <a:t>2/1/2025</a:t>
+              <a:t>2/3/2025</a:t>
             </a:fld>
             <a:endParaRPr lang="en-US"/>
           </a:p>
@@ -850,7 +874,7 @@
           <a:p>
             <a:fld id="{7A4E0488-0F40-9645-8EBB-4836F989A1A3}" type="datetimeFigureOut">
               <a:rPr lang="en-US" smtClean="0"/>
-              <a:t>2/1/2025</a:t>
+              <a:t>2/3/2025</a:t>
             </a:fld>
             <a:endParaRPr lang="en-US"/>
           </a:p>
@@ -1061,7 +1085,7 @@
           <a:p>
             <a:fld id="{7A4E0488-0F40-9645-8EBB-4836F989A1A3}" type="datetimeFigureOut">
               <a:rPr lang="en-US" smtClean="0"/>
-              <a:t>2/1/2025</a:t>
+              <a:t>2/3/2025</a:t>
             </a:fld>
             <a:endParaRPr lang="en-US"/>
           </a:p>
@@ -1189,7 +1213,7 @@
           </a:lstStyle>
           <a:p>
             <a:r>
-              <a:rPr lang="en-US" dirty="0"/>
+              <a:rPr lang="en-US"/>
               <a:t>Click to edit Master title style</a:t>
             </a:r>
           </a:p>
@@ -1249,35 +1273,35 @@
           <a:p>
             <a:pPr lvl="0"/>
             <a:r>
-              <a:rPr lang="en-US" dirty="0"/>
+              <a:rPr lang="en-US"/>
               <a:t>Edit Master text styles</a:t>
             </a:r>
           </a:p>
           <a:p>
             <a:pPr lvl="1"/>
             <a:r>
-              <a:rPr lang="en-US" dirty="0"/>
+              <a:rPr lang="en-US"/>
               <a:t>Second level</a:t>
             </a:r>
           </a:p>
           <a:p>
             <a:pPr lvl="2"/>
             <a:r>
-              <a:rPr lang="en-US" dirty="0"/>
+              <a:rPr lang="en-US"/>
               <a:t>Third level</a:t>
             </a:r>
           </a:p>
           <a:p>
             <a:pPr lvl="3"/>
             <a:r>
-              <a:rPr lang="en-US" dirty="0"/>
+              <a:rPr lang="en-US"/>
               <a:t>Fourth level</a:t>
             </a:r>
           </a:p>
           <a:p>
             <a:pPr lvl="4"/>
             <a:r>
-              <a:rPr lang="en-US" dirty="0"/>
+              <a:rPr lang="en-US"/>
               <a:t>Fifth level</a:t>
             </a:r>
           </a:p>
@@ -1306,7 +1330,7 @@
           <a:p>
             <a:fld id="{7A4E0488-0F40-9645-8EBB-4836F989A1A3}" type="datetimeFigureOut">
               <a:rPr lang="en-US" smtClean="0"/>
-              <a:t>2/1/2025</a:t>
+              <a:t>2/3/2025</a:t>
             </a:fld>
             <a:endParaRPr lang="en-US"/>
           </a:p>
@@ -1434,7 +1458,7 @@
           </a:lstStyle>
           <a:p>
             <a:r>
-              <a:rPr lang="en-US" dirty="0"/>
+              <a:rPr lang="en-US"/>
               <a:t>Click to edit Master title style</a:t>
             </a:r>
           </a:p>
@@ -1559,7 +1583,7 @@
           <a:p>
             <a:pPr lvl="0"/>
             <a:r>
-              <a:rPr lang="en-US" dirty="0"/>
+              <a:rPr lang="en-US"/>
               <a:t>Edit Master text styles</a:t>
             </a:r>
           </a:p>
@@ -1588,7 +1612,7 @@
           <a:p>
             <a:fld id="{7A4E0488-0F40-9645-8EBB-4836F989A1A3}" type="datetimeFigureOut">
               <a:rPr lang="en-US" smtClean="0"/>
-              <a:t>2/1/2025</a:t>
+              <a:t>2/3/2025</a:t>
             </a:fld>
             <a:endParaRPr lang="en-US"/>
           </a:p>
@@ -1740,7 +1764,7 @@
           </a:lstStyle>
           <a:p>
             <a:r>
-              <a:rPr lang="en-US" dirty="0"/>
+              <a:rPr lang="en-US"/>
               <a:t>Click to edit Master title style</a:t>
             </a:r>
           </a:p>
@@ -1800,35 +1824,35 @@
           <a:p>
             <a:pPr lvl="0"/>
             <a:r>
-              <a:rPr lang="en-US" dirty="0"/>
+              <a:rPr lang="en-US"/>
               <a:t>Edit Master text styles</a:t>
             </a:r>
           </a:p>
           <a:p>
             <a:pPr lvl="1"/>
             <a:r>
-              <a:rPr lang="en-US" dirty="0"/>
+              <a:rPr lang="en-US"/>
               <a:t>Second level</a:t>
             </a:r>
           </a:p>
           <a:p>
             <a:pPr lvl="2"/>
             <a:r>
-              <a:rPr lang="en-US" dirty="0"/>
+              <a:rPr lang="en-US"/>
               <a:t>Third level</a:t>
             </a:r>
           </a:p>
           <a:p>
             <a:pPr lvl="3"/>
             <a:r>
-              <a:rPr lang="en-US" dirty="0"/>
+              <a:rPr lang="en-US"/>
               <a:t>Fourth level</a:t>
             </a:r>
           </a:p>
           <a:p>
             <a:pPr lvl="4"/>
             <a:r>
-              <a:rPr lang="en-US" dirty="0"/>
+              <a:rPr lang="en-US"/>
               <a:t>Fifth level</a:t>
             </a:r>
           </a:p>
@@ -1888,35 +1912,35 @@
           <a:p>
             <a:pPr lvl="0"/>
             <a:r>
-              <a:rPr lang="en-US" dirty="0"/>
+              <a:rPr lang="en-US"/>
               <a:t>Edit Master text styles</a:t>
             </a:r>
           </a:p>
           <a:p>
             <a:pPr lvl="1"/>
             <a:r>
-              <a:rPr lang="en-US" dirty="0"/>
+              <a:rPr lang="en-US"/>
               <a:t>Second level</a:t>
             </a:r>
           </a:p>
           <a:p>
             <a:pPr lvl="2"/>
             <a:r>
-              <a:rPr lang="en-US" dirty="0"/>
+              <a:rPr lang="en-US"/>
               <a:t>Third level</a:t>
             </a:r>
           </a:p>
           <a:p>
             <a:pPr lvl="3"/>
             <a:r>
-              <a:rPr lang="en-US" dirty="0"/>
+              <a:rPr lang="en-US"/>
               <a:t>Fourth level</a:t>
             </a:r>
           </a:p>
           <a:p>
             <a:pPr lvl="4"/>
             <a:r>
-              <a:rPr lang="en-US" dirty="0"/>
+              <a:rPr lang="en-US"/>
               <a:t>Fifth level</a:t>
             </a:r>
           </a:p>
@@ -1945,7 +1969,7 @@
           <a:p>
             <a:fld id="{7A4E0488-0F40-9645-8EBB-4836F989A1A3}" type="datetimeFigureOut">
               <a:rPr lang="en-US" smtClean="0"/>
-              <a:t>2/1/2025</a:t>
+              <a:t>2/3/2025</a:t>
             </a:fld>
             <a:endParaRPr lang="en-US"/>
           </a:p>
@@ -2360,7 +2384,7 @@
           <a:p>
             <a:fld id="{7A4E0488-0F40-9645-8EBB-4836F989A1A3}" type="datetimeFigureOut">
               <a:rPr lang="en-US" smtClean="0"/>
-              <a:t>2/1/2025</a:t>
+              <a:t>2/3/2025</a:t>
             </a:fld>
             <a:endParaRPr lang="en-US"/>
           </a:p>
@@ -2480,7 +2504,7 @@
           <a:lstStyle/>
           <a:p>
             <a:r>
-              <a:rPr lang="en-US" dirty="0"/>
+              <a:rPr lang="en-US"/>
               <a:t>Click to edit Master title style</a:t>
             </a:r>
           </a:p>
@@ -2509,7 +2533,7 @@
           <a:p>
             <a:fld id="{7A4E0488-0F40-9645-8EBB-4836F989A1A3}" type="datetimeFigureOut">
               <a:rPr lang="en-US" smtClean="0"/>
-              <a:t>2/1/2025</a:t>
+              <a:t>2/3/2025</a:t>
             </a:fld>
             <a:endParaRPr lang="en-US"/>
           </a:p>
@@ -2622,7 +2646,7 @@
           <a:p>
             <a:fld id="{7A4E0488-0F40-9645-8EBB-4836F989A1A3}" type="datetimeFigureOut">
               <a:rPr lang="en-US" smtClean="0"/>
-              <a:t>2/1/2025</a:t>
+              <a:t>2/3/2025</a:t>
             </a:fld>
             <a:endParaRPr lang="en-US"/>
           </a:p>
@@ -2936,7 +2960,7 @@
           <a:p>
             <a:fld id="{7A4E0488-0F40-9645-8EBB-4836F989A1A3}" type="datetimeFigureOut">
               <a:rPr lang="en-US" smtClean="0"/>
-              <a:t>2/1/2025</a:t>
+              <a:t>2/3/2025</a:t>
             </a:fld>
             <a:endParaRPr lang="en-US"/>
           </a:p>
@@ -3227,7 +3251,7 @@
           <a:p>
             <a:fld id="{7A4E0488-0F40-9645-8EBB-4836F989A1A3}" type="datetimeFigureOut">
               <a:rPr lang="en-US" smtClean="0"/>
-              <a:t>2/1/2025</a:t>
+              <a:t>2/3/2025</a:t>
             </a:fld>
             <a:endParaRPr lang="en-US"/>
           </a:p>
@@ -3458,7 +3482,7 @@
             </a:lvl1pPr>
           </a:lstStyle>
           <a:p>
-            <a:endParaRPr lang="en-US" dirty="0"/>
+            <a:endParaRPr lang="en-US"/>
           </a:p>
         </p:txBody>
       </p:sp>
@@ -3544,7 +3568,7 @@
             </a:lvl1pPr>
           </a:lstStyle>
           <a:p>
-            <a:endParaRPr lang="en-US" dirty="0"/>
+            <a:endParaRPr lang="en-US"/>
           </a:p>
         </p:txBody>
       </p:sp>
@@ -3612,7 +3636,7 @@
           <a:lstStyle/>
           <a:p>
             <a:r>
-              <a:rPr lang="en-US" sz="1200" dirty="0"/>
+              <a:rPr lang="en-US" sz="1200"/>
               <a:t>©BOLEDU</a:t>
             </a:r>
           </a:p>
@@ -3702,7 +3726,7 @@
           <a:lstStyle/>
           <a:p>
             <a:r>
-              <a:rPr lang="en-US" dirty="0"/>
+              <a:rPr lang="en-US"/>
               <a:t>Click to edit Master title style</a:t>
             </a:r>
           </a:p>
@@ -4045,7 +4069,7 @@
           <a:lstStyle/>
           <a:p>
             <a:r>
-              <a:rPr lang="en-US" dirty="0"/>
+              <a:rPr lang="en-US"/>
               <a:t>SOC Design Lab</a:t>
             </a:r>
           </a:p>
@@ -4069,24 +4093,23 @@
           <a:lstStyle/>
           <a:p>
             <a:r>
-              <a:rPr lang="en-US" dirty="0"/>
+              <a:rPr lang="en-US"/>
               <a:t>Lab1</a:t>
             </a:r>
             <a:r>
-              <a:rPr lang="en-US" altLang="zh-CN" dirty="0"/>
+              <a:rPr lang="en-US" altLang="zh-CN"/>
               <a:t> – Tool Installation</a:t>
             </a:r>
-            <a:endParaRPr lang="en-US" dirty="0"/>
-          </a:p>
-          <a:p>
-            <a:endParaRPr lang="en-US" sz="2400" dirty="0"/>
+            <a:endParaRPr lang="en-US"/>
+          </a:p>
+          <a:p>
+            <a:endParaRPr lang="en-US" sz="2400"/>
           </a:p>
           <a:p>
             <a:r>
               <a:rPr lang="en-US" sz="2400"/>
               <a:t>TAs</a:t>
             </a:r>
-            <a:endParaRPr lang="en-US" sz="2400" dirty="0"/>
           </a:p>
         </p:txBody>
       </p:sp>
@@ -4155,7 +4178,7 @@
           <a:lstStyle/>
           <a:p>
             <a:r>
-              <a:rPr lang="en-US" dirty="0"/>
+              <a:rPr lang="en-US"/>
               <a:t>Run a simple case to verify the simulation and synthesis function</a:t>
             </a:r>
           </a:p>
@@ -4186,13 +4209,13 @@
               <a:buNone/>
             </a:pPr>
             <a:r>
-              <a:rPr lang="en-US" altLang="zh-CN" b="1" dirty="0"/>
+              <a:rPr lang="en-US" altLang="zh-CN" b="1"/>
               <a:t>Create a new project</a:t>
             </a:r>
           </a:p>
           <a:p>
             <a:r>
-              <a:rPr lang="en-US" dirty="0"/>
+              <a:rPr lang="en-US"/>
               <a:t>Add constraints</a:t>
             </a:r>
           </a:p>
@@ -4590,7 +4613,7 @@
               <a:buNone/>
             </a:pPr>
             <a:r>
-              <a:rPr lang="en-US" altLang="zh-CN" b="1" dirty="0">
+              <a:rPr lang="en-US" altLang="zh-CN" b="1">
                 <a:solidFill>
                   <a:srgbClr val="FF0000"/>
                 </a:solidFill>
@@ -4665,7 +4688,7 @@
           <a:lstStyle/>
           <a:p>
             <a:r>
-              <a:rPr lang="en-US" dirty="0"/>
+              <a:rPr lang="en-US"/>
               <a:t>Run a simple case to verify the simulation and synthesis function</a:t>
             </a:r>
           </a:p>
@@ -4696,13 +4719,13 @@
               <a:buNone/>
             </a:pPr>
             <a:r>
-              <a:rPr lang="en-US" altLang="zh-CN" b="1" dirty="0"/>
+              <a:rPr lang="en-US" altLang="zh-CN" b="1"/>
               <a:t>Create a new project</a:t>
             </a:r>
           </a:p>
           <a:p>
             <a:r>
-              <a:rPr lang="en-US" dirty="0"/>
+              <a:rPr lang="en-US"/>
               <a:t>Select FPGA board: xc7z020clg400-1</a:t>
             </a:r>
           </a:p>
@@ -4968,7 +4991,7 @@
           <a:lstStyle/>
           <a:p>
             <a:r>
-              <a:rPr lang="en-US" dirty="0"/>
+              <a:rPr lang="en-US"/>
               <a:t>Run a simple case to verify the simulation and synthesis function</a:t>
             </a:r>
           </a:p>
@@ -4999,13 +5022,13 @@
               <a:buNone/>
             </a:pPr>
             <a:r>
-              <a:rPr lang="en-US" altLang="zh-CN" b="1" dirty="0"/>
+              <a:rPr lang="en-US" altLang="zh-CN" b="1"/>
               <a:t>Create a new project</a:t>
             </a:r>
           </a:p>
           <a:p>
             <a:r>
-              <a:rPr lang="en-US" dirty="0"/>
+              <a:rPr lang="en-US"/>
               <a:t>Finish creating the project</a:t>
             </a:r>
           </a:p>
@@ -5271,7 +5294,7 @@
           <a:lstStyle/>
           <a:p>
             <a:r>
-              <a:rPr lang="en-US" dirty="0"/>
+              <a:rPr lang="en-US"/>
               <a:t>Run a simple case to verify the simulation and synthesis function</a:t>
             </a:r>
           </a:p>
@@ -5302,13 +5325,13 @@
               <a:buNone/>
             </a:pPr>
             <a:r>
-              <a:rPr lang="en-US" altLang="zh-CN" b="1" dirty="0"/>
+              <a:rPr lang="en-US" altLang="zh-CN" b="1"/>
               <a:t>Add files</a:t>
             </a:r>
           </a:p>
           <a:p>
             <a:r>
-              <a:rPr lang="en-US" dirty="0"/>
+              <a:rPr lang="en-US"/>
               <a:t>Add design sources</a:t>
             </a:r>
           </a:p>
@@ -6036,7 +6059,7 @@
           <a:lstStyle/>
           <a:p>
             <a:r>
-              <a:rPr lang="en-US" dirty="0"/>
+              <a:rPr lang="en-US"/>
               <a:t>Run a simple case to verify the simulation and synthesis function</a:t>
             </a:r>
           </a:p>
@@ -6072,13 +6095,13 @@
               <a:buNone/>
             </a:pPr>
             <a:r>
-              <a:rPr lang="en-US" altLang="zh-CN" b="1" dirty="0"/>
+              <a:rPr lang="en-US" altLang="zh-CN" b="1"/>
               <a:t>Add files</a:t>
             </a:r>
           </a:p>
           <a:p>
             <a:r>
-              <a:rPr lang="en-US" dirty="0"/>
+              <a:rPr lang="en-US"/>
               <a:t>Add design sources (First copy the files from host to VM)</a:t>
             </a:r>
           </a:p>
@@ -6662,7 +6685,7 @@
           <a:lstStyle/>
           <a:p>
             <a:r>
-              <a:rPr lang="en-US" dirty="0"/>
+              <a:rPr lang="en-US"/>
               <a:t>Run a simple case to verify the simulation and synthesis function</a:t>
             </a:r>
           </a:p>
@@ -6693,13 +6716,13 @@
               <a:buNone/>
             </a:pPr>
             <a:r>
-              <a:rPr lang="en-US" altLang="zh-CN" b="1" dirty="0"/>
+              <a:rPr lang="en-US" altLang="zh-CN" b="1"/>
               <a:t>Add files</a:t>
             </a:r>
           </a:p>
           <a:p>
             <a:r>
-              <a:rPr lang="en-US" dirty="0"/>
+              <a:rPr lang="en-US"/>
               <a:t>Add testbench</a:t>
             </a:r>
           </a:p>
@@ -7427,7 +7450,7 @@
           <a:lstStyle/>
           <a:p>
             <a:r>
-              <a:rPr lang="en-US" dirty="0"/>
+              <a:rPr lang="en-US"/>
               <a:t>Run a simple case to verify the simulation and synthesis function</a:t>
             </a:r>
           </a:p>
@@ -7458,13 +7481,13 @@
               <a:buNone/>
             </a:pPr>
             <a:r>
-              <a:rPr lang="en-US" altLang="zh-CN" b="1" dirty="0"/>
+              <a:rPr lang="en-US" altLang="zh-CN" b="1"/>
               <a:t>Add files</a:t>
             </a:r>
           </a:p>
           <a:p>
             <a:r>
-              <a:rPr lang="en-US" dirty="0"/>
+              <a:rPr lang="en-US"/>
               <a:t>Add testbench</a:t>
             </a:r>
           </a:p>
@@ -8078,7 +8101,7 @@
           <a:lstStyle/>
           <a:p>
             <a:r>
-              <a:rPr lang="en-US" dirty="0"/>
+              <a:rPr lang="en-US"/>
               <a:t>Run a simple case to verify the simulation and synthesis function</a:t>
             </a:r>
           </a:p>
@@ -8109,7 +8132,7 @@
               <a:buNone/>
             </a:pPr>
             <a:r>
-              <a:rPr lang="en-US" altLang="zh-CN" b="1" dirty="0"/>
+              <a:rPr lang="en-US" altLang="zh-CN" b="1"/>
               <a:t>Run simulation</a:t>
             </a:r>
           </a:p>
@@ -8744,7 +8767,7 @@
               <a:buNone/>
             </a:pPr>
             <a:r>
-              <a:rPr lang="en-US" altLang="zh-CN" b="1" dirty="0">
+              <a:rPr lang="en-US" altLang="zh-CN" b="1">
                 <a:solidFill>
                   <a:srgbClr val="FF0000"/>
                 </a:solidFill>
@@ -8951,7 +8974,7 @@
               <a:buNone/>
             </a:pPr>
             <a:r>
-              <a:rPr lang="en-US" altLang="zh-CN" b="1" dirty="0">
+              <a:rPr lang="en-US" altLang="zh-CN" b="1">
                 <a:solidFill>
                   <a:srgbClr val="FF0000"/>
                 </a:solidFill>
@@ -9158,7 +9181,7 @@
               <a:buNone/>
             </a:pPr>
             <a:r>
-              <a:rPr lang="en-US" altLang="zh-CN" b="1" dirty="0">
+              <a:rPr lang="en-US" altLang="zh-CN" b="1">
                 <a:solidFill>
                   <a:srgbClr val="FF0000"/>
                 </a:solidFill>
@@ -9233,7 +9256,7 @@
           <a:lstStyle/>
           <a:p>
             <a:r>
-              <a:rPr lang="en-US" dirty="0"/>
+              <a:rPr lang="en-US"/>
               <a:t>Run a simple case to verify the simulation and synthesis function</a:t>
             </a:r>
           </a:p>
@@ -9264,7 +9287,7 @@
               <a:buNone/>
             </a:pPr>
             <a:r>
-              <a:rPr lang="en-US" altLang="zh-CN" b="1" dirty="0"/>
+              <a:rPr lang="en-US" altLang="zh-CN" b="1"/>
               <a:t>Run simulation</a:t>
             </a:r>
           </a:p>
@@ -10073,7 +10096,7 @@
               <a:buNone/>
             </a:pPr>
             <a:r>
-              <a:rPr lang="en-US" altLang="zh-CN" b="1" dirty="0">
+              <a:rPr lang="en-US" altLang="zh-CN" b="1">
                 <a:solidFill>
                   <a:srgbClr val="FF0000"/>
                 </a:solidFill>
@@ -10148,7 +10171,7 @@
           <a:lstStyle/>
           <a:p>
             <a:r>
-              <a:rPr lang="en-US" dirty="0"/>
+              <a:rPr lang="en-US"/>
               <a:t>Run a simple case to verify the simulation and synthesis function</a:t>
             </a:r>
           </a:p>
@@ -10179,20 +10202,20 @@
               <a:buNone/>
             </a:pPr>
             <a:r>
-              <a:rPr lang="en-US" altLang="zh-CN" b="1" dirty="0"/>
+              <a:rPr lang="en-US" altLang="zh-CN" b="1"/>
               <a:t>Run synthesis</a:t>
             </a:r>
           </a:p>
           <a:p>
             <a:r>
-              <a:rPr lang="en-US" dirty="0"/>
+              <a:rPr lang="en-US"/>
               <a:t>Create </a:t>
             </a:r>
             <a:r>
-              <a:rPr lang="en-US" altLang="zh-CN" dirty="0"/>
+              <a:rPr lang="en-US" altLang="zh-CN"/>
               <a:t>clock constraints</a:t>
             </a:r>
-            <a:endParaRPr lang="en-US" dirty="0"/>
+            <a:endParaRPr lang="en-US"/>
           </a:p>
         </p:txBody>
       </p:sp>
@@ -10755,7 +10778,7 @@
           <a:lstStyle/>
           <a:p>
             <a:r>
-              <a:rPr lang="en-US" dirty="0"/>
+              <a:rPr lang="en-US"/>
               <a:t>Objectives</a:t>
             </a:r>
           </a:p>
@@ -10785,35 +10808,35 @@
               <a:buNone/>
             </a:pPr>
             <a:r>
-              <a:rPr lang="en-US" sz="2800" dirty="0"/>
+              <a:rPr lang="en-US" sz="2800"/>
               <a:t>In this lab, you will </a:t>
             </a:r>
           </a:p>
           <a:p>
             <a:pPr lvl="1"/>
             <a:r>
-              <a:rPr lang="en-US" sz="2800" dirty="0"/>
+              <a:rPr lang="en-US" sz="2800"/>
               <a:t>Import the experimental tool development kit (including the Xilinx Vitis, </a:t>
             </a:r>
             <a:r>
-              <a:rPr lang="en-US" sz="2800" dirty="0" err="1"/>
+              <a:rPr lang="en-US" sz="2800" err="1"/>
               <a:t>GTKWave</a:t>
             </a:r>
             <a:r>
-              <a:rPr lang="en-US" sz="2800" dirty="0"/>
+              <a:rPr lang="en-US" sz="2800"/>
               <a:t>, RISC-V GCC Toolchains) into your virtual machine.</a:t>
             </a:r>
           </a:p>
           <a:p>
             <a:pPr lvl="1"/>
             <a:r>
-              <a:rPr lang="en-US" sz="2800" dirty="0"/>
+              <a:rPr lang="en-US" sz="2800"/>
               <a:t>Run a simple case to verify the simulation and synthesis function.</a:t>
             </a:r>
           </a:p>
           <a:p>
             <a:pPr lvl="1"/>
-            <a:endParaRPr lang="en-US" sz="2000" dirty="0"/>
+            <a:endParaRPr lang="en-US" sz="2000"/>
           </a:p>
         </p:txBody>
       </p:sp>
@@ -10882,7 +10905,7 @@
           <a:lstStyle/>
           <a:p>
             <a:r>
-              <a:rPr lang="en-US" dirty="0"/>
+              <a:rPr lang="en-US"/>
               <a:t>Run a simple case to verify the simulation and synthesis function</a:t>
             </a:r>
           </a:p>
@@ -10913,20 +10936,20 @@
               <a:buNone/>
             </a:pPr>
             <a:r>
-              <a:rPr lang="en-US" altLang="zh-CN" b="1" dirty="0"/>
+              <a:rPr lang="en-US" altLang="zh-CN" b="1"/>
               <a:t>Run synthesis</a:t>
             </a:r>
           </a:p>
           <a:p>
             <a:r>
-              <a:rPr lang="en-US" dirty="0"/>
+              <a:rPr lang="en-US"/>
               <a:t>Create </a:t>
             </a:r>
             <a:r>
-              <a:rPr lang="en-US" altLang="zh-CN" dirty="0"/>
+              <a:rPr lang="en-US" altLang="zh-CN"/>
               <a:t>clock constraints</a:t>
             </a:r>
-            <a:endParaRPr lang="en-US" dirty="0"/>
+            <a:endParaRPr lang="en-US"/>
           </a:p>
         </p:txBody>
       </p:sp>
@@ -11517,7 +11540,7 @@
           <a:lstStyle/>
           <a:p>
             <a:r>
-              <a:rPr lang="en-US" dirty="0"/>
+              <a:rPr lang="en-US"/>
               <a:t>Run a simple case to verify the simulation and synthesis function</a:t>
             </a:r>
           </a:p>
@@ -11548,20 +11571,20 @@
               <a:buNone/>
             </a:pPr>
             <a:r>
-              <a:rPr lang="en-US" altLang="zh-CN" b="1" dirty="0"/>
+              <a:rPr lang="en-US" altLang="zh-CN" b="1"/>
               <a:t>Run synthesis</a:t>
             </a:r>
           </a:p>
           <a:p>
             <a:r>
-              <a:rPr lang="en-US" dirty="0"/>
+              <a:rPr lang="en-US"/>
               <a:t>Create </a:t>
             </a:r>
             <a:r>
-              <a:rPr lang="en-US" altLang="zh-CN" dirty="0"/>
+              <a:rPr lang="en-US" altLang="zh-CN"/>
               <a:t>clock constraints</a:t>
             </a:r>
-            <a:endParaRPr lang="en-US" dirty="0"/>
+            <a:endParaRPr lang="en-US"/>
           </a:p>
         </p:txBody>
       </p:sp>
@@ -11918,7 +11941,7 @@
           <a:lstStyle/>
           <a:p>
             <a:r>
-              <a:rPr lang="en-US" dirty="0"/>
+              <a:rPr lang="en-US"/>
               <a:t>Run a simple case to verify the simulation and synthesis function</a:t>
             </a:r>
           </a:p>
@@ -11949,20 +11972,15 @@
               <a:buNone/>
             </a:pPr>
             <a:r>
-              <a:rPr lang="en-US" altLang="zh-CN" b="1" dirty="0"/>
+              <a:rPr lang="en-US" altLang="zh-CN" b="1"/>
               <a:t>Run synthesis</a:t>
             </a:r>
           </a:p>
           <a:p>
             <a:r>
-              <a:rPr lang="en-US" dirty="0"/>
-              <a:t>Run synthesis (It takes some time…</a:t>
-            </a:r>
-            <a:r>
               <a:rPr lang="en-US"/>
-              <a:t>Please wait…)</a:t>
-            </a:r>
-            <a:endParaRPr lang="en-US" dirty="0"/>
+              <a:t>Run synthesis (It takes some time…Please wait…)</a:t>
+            </a:r>
           </a:p>
         </p:txBody>
       </p:sp>
@@ -12697,7 +12715,7 @@
           <a:lstStyle/>
           <a:p>
             <a:r>
-              <a:rPr lang="en-US" dirty="0"/>
+              <a:rPr lang="en-US"/>
               <a:t>Run a simple case to verify the simulation and synthesis function</a:t>
             </a:r>
           </a:p>
@@ -12728,13 +12746,13 @@
               <a:buNone/>
             </a:pPr>
             <a:r>
-              <a:rPr lang="en-US" altLang="zh-CN" b="1" dirty="0"/>
+              <a:rPr lang="en-US" altLang="zh-CN" b="1"/>
               <a:t>Run synthesis</a:t>
             </a:r>
           </a:p>
           <a:p>
             <a:r>
-              <a:rPr lang="en-US" dirty="0"/>
+              <a:rPr lang="en-US"/>
               <a:t>Report timing</a:t>
             </a:r>
           </a:p>
@@ -13336,7 +13354,7 @@
               <a:buNone/>
             </a:pPr>
             <a:r>
-              <a:rPr lang="en-US" altLang="zh-CN" b="1" dirty="0">
+              <a:rPr lang="en-US" altLang="zh-CN" b="1">
                 <a:solidFill>
                   <a:srgbClr val="FF0000"/>
                 </a:solidFill>
@@ -13543,7 +13561,7 @@
               <a:buNone/>
             </a:pPr>
             <a:r>
-              <a:rPr lang="en-US" altLang="zh-CN" b="1" dirty="0">
+              <a:rPr lang="en-US" altLang="zh-CN" b="1">
                 <a:solidFill>
                   <a:srgbClr val="FF0000"/>
                 </a:solidFill>
@@ -13750,7 +13768,7 @@
               <a:buNone/>
             </a:pPr>
             <a:r>
-              <a:rPr lang="en-US" altLang="zh-CN" b="1" dirty="0">
+              <a:rPr lang="en-US" altLang="zh-CN" b="1">
                 <a:solidFill>
                   <a:srgbClr val="FF0000"/>
                 </a:solidFill>
@@ -13957,7 +13975,7 @@
               <a:buNone/>
             </a:pPr>
             <a:r>
-              <a:rPr lang="en-US" altLang="zh-CN" b="1" dirty="0">
+              <a:rPr lang="en-US" altLang="zh-CN" b="1">
                 <a:solidFill>
                   <a:srgbClr val="FF0000"/>
                 </a:solidFill>
@@ -13965,7 +13983,7 @@
               <a:t>Since no </a:t>
             </a:r>
             <a:r>
-              <a:rPr lang="en-US" altLang="zh-CN" b="1" dirty="0" err="1">
+              <a:rPr lang="en-US" altLang="zh-CN" b="1" err="1">
                 <a:solidFill>
                   <a:srgbClr val="FF0000"/>
                 </a:solidFill>
@@ -13973,7 +13991,7 @@
               <a:t>clk</a:t>
             </a:r>
             <a:r>
-              <a:rPr lang="en-US" altLang="zh-CN" b="1" dirty="0">
+              <a:rPr lang="en-US" altLang="zh-CN" b="1">
                 <a:solidFill>
                   <a:srgbClr val="FF0000"/>
                 </a:solidFill>
@@ -14078,7 +14096,7 @@
           <a:lstStyle/>
           <a:p>
             <a:r>
-              <a:rPr lang="en-US" dirty="0"/>
+              <a:rPr lang="en-US"/>
               <a:t>Run a simple case to verify the simulation and synthesis function</a:t>
             </a:r>
           </a:p>
@@ -14109,13 +14127,13 @@
               <a:buNone/>
             </a:pPr>
             <a:r>
-              <a:rPr lang="en-US" altLang="zh-CN" b="1" dirty="0"/>
+              <a:rPr lang="en-US" altLang="zh-CN" b="1"/>
               <a:t>Run synthesis</a:t>
             </a:r>
           </a:p>
           <a:p>
             <a:r>
-              <a:rPr lang="en-US" dirty="0"/>
+              <a:rPr lang="en-US"/>
               <a:t>Report utilization</a:t>
             </a:r>
           </a:p>
@@ -14492,7 +14510,7 @@
               <a:buNone/>
             </a:pPr>
             <a:r>
-              <a:rPr lang="en-US" altLang="zh-CN" b="1" dirty="0">
+              <a:rPr lang="en-US" altLang="zh-CN" b="1">
                 <a:solidFill>
                   <a:srgbClr val="FF0000"/>
                 </a:solidFill>
@@ -14699,7 +14717,7 @@
               <a:buNone/>
             </a:pPr>
             <a:r>
-              <a:rPr lang="en-US" altLang="zh-CN" b="1" dirty="0">
+              <a:rPr lang="en-US" altLang="zh-CN" b="1">
                 <a:solidFill>
                   <a:srgbClr val="FF0000"/>
                 </a:solidFill>
@@ -14936,7 +14954,7 @@
               <a:buNone/>
             </a:pPr>
             <a:r>
-              <a:rPr lang="en-US" altLang="zh-CN" b="1" dirty="0">
+              <a:rPr lang="en-US" altLang="zh-CN" b="1">
                 <a:solidFill>
                   <a:srgbClr val="FF0000"/>
                 </a:solidFill>
@@ -15287,7 +15305,7 @@
               <a:buNone/>
             </a:pPr>
             <a:r>
-              <a:rPr lang="en-US" altLang="zh-CN" b="1" dirty="0">
+              <a:rPr lang="en-US" altLang="zh-CN" b="1">
                 <a:solidFill>
                   <a:srgbClr val="FF0000"/>
                 </a:solidFill>
@@ -15343,10 +15361,10 @@
           <a:lstStyle/>
           <a:p>
             <a:r>
-              <a:rPr lang="en-US" altLang="zh-CN" dirty="0"/>
+              <a:rPr lang="en-US" altLang="zh-CN"/>
               <a:t>Submission</a:t>
             </a:r>
-            <a:endParaRPr lang="en-US" dirty="0"/>
+            <a:endParaRPr lang="en-US"/>
           </a:p>
         </p:txBody>
       </p:sp>
@@ -15380,63 +15398,63 @@
               <a:buNone/>
             </a:pPr>
             <a:r>
-              <a:rPr lang="en-US" altLang="zh-CN" b="1" dirty="0"/>
+              <a:rPr lang="en-US" altLang="zh-CN" b="1"/>
               <a:t>Submit to </a:t>
             </a:r>
             <a:r>
-              <a:rPr lang="en-US" altLang="zh-CN" b="1" dirty="0" err="1"/>
+              <a:rPr lang="en-US" altLang="zh-CN" b="1" err="1"/>
               <a:t>HackMD</a:t>
             </a:r>
             <a:r>
-              <a:rPr lang="en-US" altLang="zh-CN" b="1" dirty="0"/>
+              <a:rPr lang="en-US" altLang="zh-CN" b="1"/>
               <a:t>.</a:t>
             </a:r>
           </a:p>
           <a:p>
             <a:r>
-              <a:rPr lang="en-US" dirty="0"/>
+              <a:rPr lang="en-US"/>
               <a:t>Simulation success screenshot</a:t>
             </a:r>
           </a:p>
           <a:p>
             <a:r>
-              <a:rPr lang="en-US" altLang="zh-CN" dirty="0"/>
+              <a:rPr lang="en-US" altLang="zh-CN"/>
               <a:t>Synthesis success screenshot</a:t>
             </a:r>
-            <a:endParaRPr lang="en-US" altLang="zh-CN" b="1" dirty="0"/>
+            <a:endParaRPr lang="en-US" altLang="zh-CN" b="1"/>
           </a:p>
           <a:p>
             <a:pPr marL="0" indent="0">
               <a:buNone/>
             </a:pPr>
             <a:r>
-              <a:rPr lang="en-US" altLang="zh-CN" b="1" dirty="0"/>
+              <a:rPr lang="en-US" altLang="zh-CN" b="1"/>
               <a:t>Submit to GitHub.</a:t>
             </a:r>
           </a:p>
           <a:p>
             <a:pPr fontAlgn="base"/>
             <a:r>
-              <a:rPr lang="en-HK" dirty="0"/>
+              <a:rPr lang="en-HK"/>
               <a:t>Create your repository. In your lab1 folder, please include:</a:t>
             </a:r>
           </a:p>
           <a:p>
             <a:pPr lvl="1" fontAlgn="base"/>
             <a:r>
-              <a:rPr lang="en-HK" dirty="0">
+              <a:rPr lang="en-HK">
                 <a:effectLst/>
               </a:rPr>
               <a:t>/</a:t>
             </a:r>
             <a:r>
-              <a:rPr lang="en-HK" dirty="0" err="1">
+              <a:rPr lang="en-HK" err="1">
                 <a:effectLst/>
               </a:rPr>
               <a:t>src</a:t>
             </a:r>
             <a:r>
-              <a:rPr lang="en-HK" dirty="0">
+              <a:rPr lang="en-HK">
                 <a:effectLst/>
               </a:rPr>
               <a:t> - design sources, .v, tb</a:t>
@@ -15445,32 +15463,23 @@
           <a:p>
             <a:pPr lvl="1" fontAlgn="base"/>
             <a:r>
-              <a:rPr lang="en-HK" dirty="0">
+              <a:rPr lang="en-HK">
                 <a:effectLst/>
               </a:rPr>
               <a:t>/report - </a:t>
             </a:r>
             <a:r>
-              <a:rPr lang="en-HK" dirty="0" err="1">
+              <a:rPr lang="en-HK" err="1">
                 <a:effectLst/>
               </a:rPr>
               <a:t>rtl</a:t>
             </a:r>
             <a:r>
-              <a:rPr lang="en-HK" dirty="0">
-                <a:effectLst/>
-              </a:rPr>
-              <a:t> simulation log, synthesis log/resource, </a:t>
-            </a:r>
-            <a:r>
               <a:rPr lang="en-HK">
                 <a:effectLst/>
               </a:rPr>
-              <a:t>timing report</a:t>
-            </a:r>
-            <a:endParaRPr lang="en-HK" dirty="0">
-              <a:effectLst/>
-            </a:endParaRPr>
+              <a:t> simulation log, synthesis log/resource, timing report</a:t>
+            </a:r>
           </a:p>
         </p:txBody>
       </p:sp>
@@ -15532,7 +15541,7 @@
           <a:lstStyle/>
           <a:p>
             <a:r>
-              <a:rPr lang="en-US" dirty="0"/>
+              <a:rPr lang="en-US"/>
               <a:t>Needed files</a:t>
             </a:r>
           </a:p>
@@ -15562,64 +15571,204 @@
           <a:lstStyle/>
           <a:p>
             <a:r>
-              <a:rPr lang="en-US" dirty="0"/>
+              <a:rPr lang="en-US"/>
               <a:t>Vitis VM folder: (copy from TAs)</a:t>
             </a:r>
           </a:p>
           <a:p>
             <a:pPr lvl="1"/>
             <a:r>
-              <a:rPr lang="en-US" altLang="zh-CN" dirty="0"/>
+              <a:rPr lang="en-US" altLang="zh-CN"/>
               <a:t>Experimental tool development kit zip files</a:t>
             </a:r>
           </a:p>
           <a:p>
             <a:pPr lvl="1"/>
             <a:r>
-              <a:rPr lang="en-US" dirty="0"/>
+              <a:rPr lang="en-US"/>
               <a:t>User guide</a:t>
             </a:r>
           </a:p>
           <a:p>
-            <a:r>
-              <a:rPr lang="en-US" dirty="0"/>
+            <a:pPr lvl="1"/>
+            <a:r>
+              <a:rPr lang="en-US"/>
+              <a:t>Note</a:t>
+            </a:r>
+            <a:r>
+              <a:rPr lang="en-US" altLang="zh-CN"/>
+              <a:t>:</a:t>
+            </a:r>
+            <a:r>
+              <a:rPr lang="zh-CN" altLang="en-US"/>
+              <a:t> </a:t>
+            </a:r>
+            <a:r>
+              <a:rPr lang="en-US" altLang="zh-CN"/>
+              <a:t>The</a:t>
+            </a:r>
+            <a:r>
+              <a:rPr lang="zh-CN" altLang="en-US"/>
+              <a:t> </a:t>
+            </a:r>
+            <a:r>
+              <a:rPr lang="en-US" altLang="zh-CN"/>
+              <a:t>unzip</a:t>
+            </a:r>
+            <a:r>
+              <a:rPr lang="zh-CN" altLang="en-US"/>
+              <a:t> </a:t>
+            </a:r>
+            <a:r>
+              <a:rPr lang="en-US" altLang="zh-CN"/>
+              <a:t>files</a:t>
+            </a:r>
+            <a:r>
+              <a:rPr lang="zh-CN" altLang="en-US"/>
+              <a:t> </a:t>
+            </a:r>
+            <a:r>
+              <a:rPr lang="en-US" altLang="zh-CN"/>
+              <a:t>have</a:t>
+            </a:r>
+            <a:r>
+              <a:rPr lang="zh-CN" altLang="en-US"/>
+              <a:t> </a:t>
+            </a:r>
+            <a:r>
+              <a:rPr lang="en-US" altLang="zh-CN"/>
+              <a:t>a</a:t>
+            </a:r>
+            <a:r>
+              <a:rPr lang="zh-CN" altLang="en-US"/>
+              <a:t> </a:t>
+            </a:r>
+            <a:r>
+              <a:rPr lang="en-US" altLang="zh-CN"/>
+              <a:t>size</a:t>
+            </a:r>
+            <a:r>
+              <a:rPr lang="zh-CN" altLang="en-US"/>
+              <a:t> </a:t>
+            </a:r>
+            <a:r>
+              <a:rPr lang="en-US" altLang="zh-CN"/>
+              <a:t>of</a:t>
+            </a:r>
+            <a:r>
+              <a:rPr lang="zh-CN" altLang="en-US"/>
+              <a:t> </a:t>
+            </a:r>
+            <a:r>
+              <a:rPr lang="en-US" altLang="zh-CN"/>
+              <a:t>over</a:t>
+            </a:r>
+            <a:r>
+              <a:rPr lang="zh-CN" altLang="en-US"/>
+              <a:t> </a:t>
+            </a:r>
+            <a:r>
+              <a:rPr lang="en-US" altLang="zh-CN"/>
+              <a:t>200GB,</a:t>
+            </a:r>
+            <a:r>
+              <a:rPr lang="zh-CN" altLang="en-US"/>
+              <a:t> </a:t>
+            </a:r>
+            <a:r>
+              <a:rPr lang="en-US" altLang="zh-CN"/>
+              <a:t>please</a:t>
+            </a:r>
+            <a:r>
+              <a:rPr lang="zh-CN" altLang="en-US"/>
+              <a:t> </a:t>
+            </a:r>
+            <a:r>
+              <a:rPr lang="en-US" altLang="zh-CN"/>
+              <a:t>make</a:t>
+            </a:r>
+            <a:r>
+              <a:rPr lang="zh-CN" altLang="en-US"/>
+              <a:t> </a:t>
+            </a:r>
+            <a:r>
+              <a:rPr lang="en-US" altLang="zh-CN"/>
+              <a:t>sure</a:t>
+            </a:r>
+            <a:r>
+              <a:rPr lang="zh-CN" altLang="en-US"/>
+              <a:t> </a:t>
+            </a:r>
+            <a:r>
+              <a:rPr lang="en-US" altLang="zh-CN"/>
+              <a:t>you</a:t>
+            </a:r>
+            <a:r>
+              <a:rPr lang="zh-CN" altLang="en-US"/>
+              <a:t> </a:t>
+            </a:r>
+            <a:r>
+              <a:rPr lang="en-US" altLang="zh-CN"/>
+              <a:t>have</a:t>
+            </a:r>
+            <a:r>
+              <a:rPr lang="zh-CN" altLang="en-US"/>
+              <a:t> </a:t>
+            </a:r>
+            <a:r>
+              <a:rPr lang="en-US" altLang="zh-CN"/>
+              <a:t>enough</a:t>
+            </a:r>
+            <a:r>
+              <a:rPr lang="zh-CN" altLang="en-US"/>
+              <a:t> </a:t>
+            </a:r>
+            <a:r>
+              <a:rPr lang="en-US" altLang="zh-CN"/>
+              <a:t>space.</a:t>
+            </a:r>
+            <a:endParaRPr lang="en-US"/>
+          </a:p>
+          <a:p>
+            <a:r>
+              <a:rPr lang="en-US"/>
               <a:t>Verilog folder: (</a:t>
             </a:r>
             <a:r>
-              <a:rPr lang="en-US" dirty="0">
+              <a:rPr lang="en-US">
                 <a:hlinkClick r:id="rId2"/>
               </a:rPr>
               <a:t>https://github.com/roo-nju/hkust-soc-lab/tree/main/Lab1/Verilog</a:t>
             </a:r>
             <a:r>
-              <a:rPr lang="en-US" dirty="0"/>
+              <a:rPr lang="en-US"/>
               <a:t>)</a:t>
             </a:r>
           </a:p>
           <a:p>
             <a:pPr lvl="1"/>
             <a:r>
-              <a:rPr lang="en-US" dirty="0"/>
+              <a:rPr lang="en-US"/>
               <a:t>Design file</a:t>
             </a:r>
           </a:p>
           <a:p>
             <a:pPr lvl="1"/>
             <a:r>
-              <a:rPr lang="en-US" dirty="0"/>
+              <a:rPr lang="en-US"/>
               <a:t>Simulation file</a:t>
             </a:r>
           </a:p>
           <a:p>
             <a:pPr lvl="1"/>
             <a:r>
-              <a:rPr lang="en-US" dirty="0"/>
+              <a:rPr lang="en-US"/>
               <a:t>Test data</a:t>
             </a:r>
           </a:p>
           <a:p>
             <a:pPr lvl="1"/>
-            <a:endParaRPr lang="en-US" sz="2000" dirty="0"/>
+            <a:endParaRPr lang="en-US" sz="2000"/>
           </a:p>
         </p:txBody>
       </p:sp>
@@ -15676,7 +15825,7 @@
           <a:lstStyle/>
           <a:p>
             <a:r>
-              <a:rPr lang="en-US" dirty="0"/>
+              <a:rPr lang="en-US"/>
               <a:t>Import the experimental tool development kit to virtual machine</a:t>
             </a:r>
           </a:p>
@@ -15701,7 +15850,7 @@
               <a:buNone/>
             </a:pPr>
             <a:r>
-              <a:rPr lang="en-US" b="1" dirty="0"/>
+              <a:rPr lang="en-US" b="1"/>
               <a:t>Refer to the user guide in the Vitis VM folder</a:t>
             </a:r>
           </a:p>
@@ -15709,7 +15858,7 @@
             <a:pPr marL="0" indent="0">
               <a:buNone/>
             </a:pPr>
-            <a:endParaRPr lang="en-US" dirty="0"/>
+            <a:endParaRPr lang="en-US"/>
           </a:p>
         </p:txBody>
       </p:sp>
@@ -15890,7 +16039,7 @@
           <a:lstStyle/>
           <a:p>
             <a:r>
-              <a:rPr lang="en-US" dirty="0"/>
+              <a:rPr lang="en-US"/>
               <a:t>Run a simple case to verify the simulation and synthesis function</a:t>
             </a:r>
           </a:p>
@@ -15921,13 +16070,13 @@
               <a:buNone/>
             </a:pPr>
             <a:r>
-              <a:rPr lang="en-US" altLang="zh-CN" b="1" dirty="0"/>
+              <a:rPr lang="en-US" altLang="zh-CN" b="1"/>
               <a:t>Create a new project</a:t>
             </a:r>
           </a:p>
           <a:p>
             <a:r>
-              <a:rPr lang="en-US" dirty="0"/>
+              <a:rPr lang="en-US"/>
               <a:t>Open the vivado</a:t>
             </a:r>
           </a:p>
@@ -16028,7 +16177,7 @@
           <a:lstStyle/>
           <a:p>
             <a:r>
-              <a:rPr lang="en-US" dirty="0"/>
+              <a:rPr lang="en-US"/>
               <a:t>Run a simple case to verify the simulation and synthesis function</a:t>
             </a:r>
           </a:p>
@@ -16059,13 +16208,13 @@
               <a:buNone/>
             </a:pPr>
             <a:r>
-              <a:rPr lang="en-US" altLang="zh-CN" b="1" dirty="0"/>
+              <a:rPr lang="en-US" altLang="zh-CN" b="1"/>
               <a:t>Create a new project</a:t>
             </a:r>
           </a:p>
           <a:p>
             <a:r>
-              <a:rPr lang="en-US" dirty="0"/>
+              <a:rPr lang="en-US"/>
               <a:t>Create project</a:t>
             </a:r>
           </a:p>
@@ -16331,7 +16480,7 @@
           <a:lstStyle/>
           <a:p>
             <a:r>
-              <a:rPr lang="en-US" dirty="0"/>
+              <a:rPr lang="en-US"/>
               <a:t>Run a simple case to verify the simulation and synthesis function</a:t>
             </a:r>
           </a:p>
@@ -16362,13 +16511,13 @@
               <a:buNone/>
             </a:pPr>
             <a:r>
-              <a:rPr lang="en-US" altLang="zh-CN" b="1" dirty="0"/>
+              <a:rPr lang="en-US" altLang="zh-CN" b="1"/>
               <a:t>Create a new project</a:t>
             </a:r>
           </a:p>
           <a:p>
             <a:r>
-              <a:rPr lang="en-US" dirty="0"/>
+              <a:rPr lang="en-US"/>
               <a:t>Create project</a:t>
             </a:r>
           </a:p>
@@ -16613,7 +16762,7 @@
           <a:lstStyle/>
           <a:p>
             <a:r>
-              <a:rPr lang="en-US" dirty="0"/>
+              <a:rPr lang="en-US"/>
               <a:t>Run a simple case to verify the simulation and synthesis function</a:t>
             </a:r>
           </a:p>
@@ -16644,13 +16793,13 @@
               <a:buNone/>
             </a:pPr>
             <a:r>
-              <a:rPr lang="en-US" altLang="zh-CN" b="1" dirty="0"/>
+              <a:rPr lang="en-US" altLang="zh-CN" b="1"/>
               <a:t>Create a new project</a:t>
             </a:r>
           </a:p>
           <a:p>
             <a:r>
-              <a:rPr lang="en-US" dirty="0"/>
+              <a:rPr lang="en-US"/>
               <a:t>Select RTL project</a:t>
             </a:r>
           </a:p>
@@ -17060,7 +17209,7 @@
           <a:lstStyle/>
           <a:p>
             <a:r>
-              <a:rPr lang="en-US" dirty="0"/>
+              <a:rPr lang="en-US"/>
               <a:t>Run a simple case to verify the simulation and synthesis function</a:t>
             </a:r>
           </a:p>
@@ -17091,13 +17240,13 @@
               <a:buNone/>
             </a:pPr>
             <a:r>
-              <a:rPr lang="en-US" altLang="zh-CN" b="1" dirty="0"/>
+              <a:rPr lang="en-US" altLang="zh-CN" b="1"/>
               <a:t>Create a new project</a:t>
             </a:r>
           </a:p>
           <a:p>
             <a:r>
-              <a:rPr lang="en-US" dirty="0"/>
+              <a:rPr lang="en-US"/>
               <a:t>Add sources</a:t>
             </a:r>
           </a:p>
@@ -17495,7 +17644,7 @@
               <a:buNone/>
             </a:pPr>
             <a:r>
-              <a:rPr lang="en-US" altLang="zh-CN" b="1" dirty="0">
+              <a:rPr lang="en-US" altLang="zh-CN" b="1">
                 <a:solidFill>
                   <a:srgbClr val="FF0000"/>
                 </a:solidFill>

--- a/Lab1/Lab1 Workbook-Tool Installation.pptx
+++ b/Lab1/Lab1 Workbook-Tool Installation.pptx
@@ -146,36 +146,13 @@
 <p1510:revInfo xmlns:a="http://schemas.openxmlformats.org/drawingml/2006/main" xmlns:r="http://schemas.openxmlformats.org/officeDocument/2006/relationships" xmlns:p1510="http://schemas.microsoft.com/office/powerpoint/2015/10/main">
   <p1510:revLst>
     <p1510:client id="{626C6B34-CEA9-B442-A027-C024DA9CE728}" v="194" dt="2025-02-03T10:36:29.291"/>
+    <p1510:client id="{C74CEAD8-BC21-4E10-A576-679945636F36}" v="54" dt="2025-02-03T13:51:47.844"/>
   </p1510:revLst>
 </p1510:revInfo>
 </file>
 
 <file path=ppt/changesInfos/changesInfo1.xml><?xml version="1.0" encoding="utf-8"?>
 <pc:chgInfo xmlns:a="http://schemas.openxmlformats.org/drawingml/2006/main" xmlns:r="http://schemas.openxmlformats.org/officeDocument/2006/relationships" xmlns:ac="http://schemas.microsoft.com/office/drawing/2013/main/command" xmlns:pc="http://schemas.microsoft.com/office/powerpoint/2013/main/command">
-  <pc:docChgLst>
-    <pc:chgData name="WU Yongkun" userId="9f03f4a5-7e7a-4a26-ba55-64643d70ff11" providerId="ADAL" clId="{C74CEAD8-BC21-4E10-A576-679945636F36}"/>
-    <pc:docChg chg="modSld">
-      <pc:chgData name="WU Yongkun" userId="9f03f4a5-7e7a-4a26-ba55-64643d70ff11" providerId="ADAL" clId="{C74CEAD8-BC21-4E10-A576-679945636F36}" dt="2025-02-01T03:25:13.738" v="1" actId="20577"/>
-      <pc:docMkLst>
-        <pc:docMk/>
-      </pc:docMkLst>
-      <pc:sldChg chg="modSp mod">
-        <pc:chgData name="WU Yongkun" userId="9f03f4a5-7e7a-4a26-ba55-64643d70ff11" providerId="ADAL" clId="{C74CEAD8-BC21-4E10-A576-679945636F36}" dt="2025-02-01T03:25:13.738" v="1" actId="20577"/>
-        <pc:sldMkLst>
-          <pc:docMk/>
-          <pc:sldMk cId="304963755" sldId="351"/>
-        </pc:sldMkLst>
-        <pc:spChg chg="mod">
-          <ac:chgData name="WU Yongkun" userId="9f03f4a5-7e7a-4a26-ba55-64643d70ff11" providerId="ADAL" clId="{C74CEAD8-BC21-4E10-A576-679945636F36}" dt="2025-02-01T03:25:13.738" v="1" actId="20577"/>
-          <ac:spMkLst>
-            <pc:docMk/>
-            <pc:sldMk cId="304963755" sldId="351"/>
-            <ac:spMk id="7" creationId="{8A279EEE-CD37-F225-BC3E-C6D54E9F43BB}"/>
-          </ac:spMkLst>
-        </pc:spChg>
-      </pc:sldChg>
-    </pc:docChg>
-  </pc:docChgLst>
   <pc:docChgLst>
     <pc:chgData name="WU Yongkun" userId="9f03f4a5-7e7a-4a26-ba55-64643d70ff11" providerId="ADAL" clId="{4FB9C78E-FC5D-4326-955C-77E6C5EFE4E9}"/>
     <pc:docChg chg="undo custSel modSld">
@@ -336,6 +313,30 @@
     </pc:docChg>
   </pc:docChgLst>
   <pc:docChgLst>
+    <pc:chgData name="WU Yongkun" userId="9f03f4a5-7e7a-4a26-ba55-64643d70ff11" providerId="ADAL" clId="{C74CEAD8-BC21-4E10-A576-679945636F36}"/>
+    <pc:docChg chg="modSld">
+      <pc:chgData name="WU Yongkun" userId="9f03f4a5-7e7a-4a26-ba55-64643d70ff11" providerId="ADAL" clId="{C74CEAD8-BC21-4E10-A576-679945636F36}" dt="2025-02-03T13:51:47.844" v="55" actId="20577"/>
+      <pc:docMkLst>
+        <pc:docMk/>
+      </pc:docMkLst>
+      <pc:sldChg chg="modSp mod">
+        <pc:chgData name="WU Yongkun" userId="9f03f4a5-7e7a-4a26-ba55-64643d70ff11" providerId="ADAL" clId="{C74CEAD8-BC21-4E10-A576-679945636F36}" dt="2025-02-03T13:51:47.844" v="55" actId="20577"/>
+        <pc:sldMkLst>
+          <pc:docMk/>
+          <pc:sldMk cId="304963755" sldId="351"/>
+        </pc:sldMkLst>
+        <pc:spChg chg="mod">
+          <ac:chgData name="WU Yongkun" userId="9f03f4a5-7e7a-4a26-ba55-64643d70ff11" providerId="ADAL" clId="{C74CEAD8-BC21-4E10-A576-679945636F36}" dt="2025-02-03T13:51:47.844" v="55" actId="20577"/>
+          <ac:spMkLst>
+            <pc:docMk/>
+            <pc:sldMk cId="304963755" sldId="351"/>
+            <ac:spMk id="7" creationId="{8A279EEE-CD37-F225-BC3E-C6D54E9F43BB}"/>
+          </ac:spMkLst>
+        </pc:spChg>
+      </pc:sldChg>
+    </pc:docChg>
+  </pc:docChgLst>
+  <pc:docChgLst>
     <pc:chgData name="WU Yongkun" userId="9f03f4a5-7e7a-4a26-ba55-64643d70ff11" providerId="ADAL" clId="{626C6B34-CEA9-B442-A027-C024DA9CE728}"/>
     <pc:docChg chg="modSld">
       <pc:chgData name="WU Yongkun" userId="9f03f4a5-7e7a-4a26-ba55-64643d70ff11" providerId="ADAL" clId="{626C6B34-CEA9-B442-A027-C024DA9CE728}" dt="2025-02-03T10:36:29.291" v="193" actId="20577"/>
@@ -1213,7 +1214,7 @@
           </a:lstStyle>
           <a:p>
             <a:r>
-              <a:rPr lang="en-US"/>
+              <a:rPr lang="en-US" dirty="0"/>
               <a:t>Click to edit Master title style</a:t>
             </a:r>
           </a:p>
@@ -1273,35 +1274,35 @@
           <a:p>
             <a:pPr lvl="0"/>
             <a:r>
-              <a:rPr lang="en-US"/>
+              <a:rPr lang="en-US" dirty="0"/>
               <a:t>Edit Master text styles</a:t>
             </a:r>
           </a:p>
           <a:p>
             <a:pPr lvl="1"/>
             <a:r>
-              <a:rPr lang="en-US"/>
+              <a:rPr lang="en-US" dirty="0"/>
               <a:t>Second level</a:t>
             </a:r>
           </a:p>
           <a:p>
             <a:pPr lvl="2"/>
             <a:r>
-              <a:rPr lang="en-US"/>
+              <a:rPr lang="en-US" dirty="0"/>
               <a:t>Third level</a:t>
             </a:r>
           </a:p>
           <a:p>
             <a:pPr lvl="3"/>
             <a:r>
-              <a:rPr lang="en-US"/>
+              <a:rPr lang="en-US" dirty="0"/>
               <a:t>Fourth level</a:t>
             </a:r>
           </a:p>
           <a:p>
             <a:pPr lvl="4"/>
             <a:r>
-              <a:rPr lang="en-US"/>
+              <a:rPr lang="en-US" dirty="0"/>
               <a:t>Fifth level</a:t>
             </a:r>
           </a:p>
@@ -1458,7 +1459,7 @@
           </a:lstStyle>
           <a:p>
             <a:r>
-              <a:rPr lang="en-US"/>
+              <a:rPr lang="en-US" dirty="0"/>
               <a:t>Click to edit Master title style</a:t>
             </a:r>
           </a:p>
@@ -1583,7 +1584,7 @@
           <a:p>
             <a:pPr lvl="0"/>
             <a:r>
-              <a:rPr lang="en-US"/>
+              <a:rPr lang="en-US" dirty="0"/>
               <a:t>Edit Master text styles</a:t>
             </a:r>
           </a:p>
@@ -1764,7 +1765,7 @@
           </a:lstStyle>
           <a:p>
             <a:r>
-              <a:rPr lang="en-US"/>
+              <a:rPr lang="en-US" dirty="0"/>
               <a:t>Click to edit Master title style</a:t>
             </a:r>
           </a:p>
@@ -1824,35 +1825,35 @@
           <a:p>
             <a:pPr lvl="0"/>
             <a:r>
-              <a:rPr lang="en-US"/>
+              <a:rPr lang="en-US" dirty="0"/>
               <a:t>Edit Master text styles</a:t>
             </a:r>
           </a:p>
           <a:p>
             <a:pPr lvl="1"/>
             <a:r>
-              <a:rPr lang="en-US"/>
+              <a:rPr lang="en-US" dirty="0"/>
               <a:t>Second level</a:t>
             </a:r>
           </a:p>
           <a:p>
             <a:pPr lvl="2"/>
             <a:r>
-              <a:rPr lang="en-US"/>
+              <a:rPr lang="en-US" dirty="0"/>
               <a:t>Third level</a:t>
             </a:r>
           </a:p>
           <a:p>
             <a:pPr lvl="3"/>
             <a:r>
-              <a:rPr lang="en-US"/>
+              <a:rPr lang="en-US" dirty="0"/>
               <a:t>Fourth level</a:t>
             </a:r>
           </a:p>
           <a:p>
             <a:pPr lvl="4"/>
             <a:r>
-              <a:rPr lang="en-US"/>
+              <a:rPr lang="en-US" dirty="0"/>
               <a:t>Fifth level</a:t>
             </a:r>
           </a:p>
@@ -1912,35 +1913,35 @@
           <a:p>
             <a:pPr lvl="0"/>
             <a:r>
-              <a:rPr lang="en-US"/>
+              <a:rPr lang="en-US" dirty="0"/>
               <a:t>Edit Master text styles</a:t>
             </a:r>
           </a:p>
           <a:p>
             <a:pPr lvl="1"/>
             <a:r>
-              <a:rPr lang="en-US"/>
+              <a:rPr lang="en-US" dirty="0"/>
               <a:t>Second level</a:t>
             </a:r>
           </a:p>
           <a:p>
             <a:pPr lvl="2"/>
             <a:r>
-              <a:rPr lang="en-US"/>
+              <a:rPr lang="en-US" dirty="0"/>
               <a:t>Third level</a:t>
             </a:r>
           </a:p>
           <a:p>
             <a:pPr lvl="3"/>
             <a:r>
-              <a:rPr lang="en-US"/>
+              <a:rPr lang="en-US" dirty="0"/>
               <a:t>Fourth level</a:t>
             </a:r>
           </a:p>
           <a:p>
             <a:pPr lvl="4"/>
             <a:r>
-              <a:rPr lang="en-US"/>
+              <a:rPr lang="en-US" dirty="0"/>
               <a:t>Fifth level</a:t>
             </a:r>
           </a:p>
@@ -2504,7 +2505,7 @@
           <a:lstStyle/>
           <a:p>
             <a:r>
-              <a:rPr lang="en-US"/>
+              <a:rPr lang="en-US" dirty="0"/>
               <a:t>Click to edit Master title style</a:t>
             </a:r>
           </a:p>
@@ -3482,7 +3483,7 @@
             </a:lvl1pPr>
           </a:lstStyle>
           <a:p>
-            <a:endParaRPr lang="en-US"/>
+            <a:endParaRPr lang="en-US" dirty="0"/>
           </a:p>
         </p:txBody>
       </p:sp>
@@ -3568,7 +3569,7 @@
             </a:lvl1pPr>
           </a:lstStyle>
           <a:p>
-            <a:endParaRPr lang="en-US"/>
+            <a:endParaRPr lang="en-US" dirty="0"/>
           </a:p>
         </p:txBody>
       </p:sp>
@@ -3636,7 +3637,7 @@
           <a:lstStyle/>
           <a:p>
             <a:r>
-              <a:rPr lang="en-US" sz="1200"/>
+              <a:rPr lang="en-US" sz="1200" dirty="0"/>
               <a:t>©BOLEDU</a:t>
             </a:r>
           </a:p>
@@ -3726,7 +3727,7 @@
           <a:lstStyle/>
           <a:p>
             <a:r>
-              <a:rPr lang="en-US"/>
+              <a:rPr lang="en-US" dirty="0"/>
               <a:t>Click to edit Master title style</a:t>
             </a:r>
           </a:p>
@@ -4069,7 +4070,7 @@
           <a:lstStyle/>
           <a:p>
             <a:r>
-              <a:rPr lang="en-US"/>
+              <a:rPr lang="en-US" dirty="0"/>
               <a:t>SOC Design Lab</a:t>
             </a:r>
           </a:p>
@@ -4093,23 +4094,24 @@
           <a:lstStyle/>
           <a:p>
             <a:r>
-              <a:rPr lang="en-US"/>
+              <a:rPr lang="en-US" dirty="0"/>
               <a:t>Lab1</a:t>
             </a:r>
             <a:r>
-              <a:rPr lang="en-US" altLang="zh-CN"/>
+              <a:rPr lang="en-US" altLang="zh-CN" dirty="0"/>
               <a:t> – Tool Installation</a:t>
             </a:r>
-            <a:endParaRPr lang="en-US"/>
-          </a:p>
-          <a:p>
-            <a:endParaRPr lang="en-US" sz="2400"/>
+            <a:endParaRPr lang="en-US" dirty="0"/>
+          </a:p>
+          <a:p>
+            <a:endParaRPr lang="en-US" sz="2400" dirty="0"/>
           </a:p>
           <a:p>
             <a:r>
               <a:rPr lang="en-US" sz="2400"/>
               <a:t>TAs</a:t>
             </a:r>
+            <a:endParaRPr lang="en-US" sz="2400" dirty="0"/>
           </a:p>
         </p:txBody>
       </p:sp>
@@ -4178,7 +4180,7 @@
           <a:lstStyle/>
           <a:p>
             <a:r>
-              <a:rPr lang="en-US"/>
+              <a:rPr lang="en-US" dirty="0"/>
               <a:t>Run a simple case to verify the simulation and synthesis function</a:t>
             </a:r>
           </a:p>
@@ -4209,13 +4211,13 @@
               <a:buNone/>
             </a:pPr>
             <a:r>
-              <a:rPr lang="en-US" altLang="zh-CN" b="1"/>
+              <a:rPr lang="en-US" altLang="zh-CN" b="1" dirty="0"/>
               <a:t>Create a new project</a:t>
             </a:r>
           </a:p>
           <a:p>
             <a:r>
-              <a:rPr lang="en-US"/>
+              <a:rPr lang="en-US" dirty="0"/>
               <a:t>Add constraints</a:t>
             </a:r>
           </a:p>
@@ -4613,7 +4615,7 @@
               <a:buNone/>
             </a:pPr>
             <a:r>
-              <a:rPr lang="en-US" altLang="zh-CN" b="1">
+              <a:rPr lang="en-US" altLang="zh-CN" b="1" dirty="0">
                 <a:solidFill>
                   <a:srgbClr val="FF0000"/>
                 </a:solidFill>
@@ -4688,7 +4690,7 @@
           <a:lstStyle/>
           <a:p>
             <a:r>
-              <a:rPr lang="en-US"/>
+              <a:rPr lang="en-US" dirty="0"/>
               <a:t>Run a simple case to verify the simulation and synthesis function</a:t>
             </a:r>
           </a:p>
@@ -4719,13 +4721,13 @@
               <a:buNone/>
             </a:pPr>
             <a:r>
-              <a:rPr lang="en-US" altLang="zh-CN" b="1"/>
+              <a:rPr lang="en-US" altLang="zh-CN" b="1" dirty="0"/>
               <a:t>Create a new project</a:t>
             </a:r>
           </a:p>
           <a:p>
             <a:r>
-              <a:rPr lang="en-US"/>
+              <a:rPr lang="en-US" dirty="0"/>
               <a:t>Select FPGA board: xc7z020clg400-1</a:t>
             </a:r>
           </a:p>
@@ -4991,7 +4993,7 @@
           <a:lstStyle/>
           <a:p>
             <a:r>
-              <a:rPr lang="en-US"/>
+              <a:rPr lang="en-US" dirty="0"/>
               <a:t>Run a simple case to verify the simulation and synthesis function</a:t>
             </a:r>
           </a:p>
@@ -5022,13 +5024,13 @@
               <a:buNone/>
             </a:pPr>
             <a:r>
-              <a:rPr lang="en-US" altLang="zh-CN" b="1"/>
+              <a:rPr lang="en-US" altLang="zh-CN" b="1" dirty="0"/>
               <a:t>Create a new project</a:t>
             </a:r>
           </a:p>
           <a:p>
             <a:r>
-              <a:rPr lang="en-US"/>
+              <a:rPr lang="en-US" dirty="0"/>
               <a:t>Finish creating the project</a:t>
             </a:r>
           </a:p>
@@ -5294,7 +5296,7 @@
           <a:lstStyle/>
           <a:p>
             <a:r>
-              <a:rPr lang="en-US"/>
+              <a:rPr lang="en-US" dirty="0"/>
               <a:t>Run a simple case to verify the simulation and synthesis function</a:t>
             </a:r>
           </a:p>
@@ -5325,13 +5327,13 @@
               <a:buNone/>
             </a:pPr>
             <a:r>
-              <a:rPr lang="en-US" altLang="zh-CN" b="1"/>
+              <a:rPr lang="en-US" altLang="zh-CN" b="1" dirty="0"/>
               <a:t>Add files</a:t>
             </a:r>
           </a:p>
           <a:p>
             <a:r>
-              <a:rPr lang="en-US"/>
+              <a:rPr lang="en-US" dirty="0"/>
               <a:t>Add design sources</a:t>
             </a:r>
           </a:p>
@@ -6059,7 +6061,7 @@
           <a:lstStyle/>
           <a:p>
             <a:r>
-              <a:rPr lang="en-US"/>
+              <a:rPr lang="en-US" dirty="0"/>
               <a:t>Run a simple case to verify the simulation and synthesis function</a:t>
             </a:r>
           </a:p>
@@ -6095,13 +6097,13 @@
               <a:buNone/>
             </a:pPr>
             <a:r>
-              <a:rPr lang="en-US" altLang="zh-CN" b="1"/>
+              <a:rPr lang="en-US" altLang="zh-CN" b="1" dirty="0"/>
               <a:t>Add files</a:t>
             </a:r>
           </a:p>
           <a:p>
             <a:r>
-              <a:rPr lang="en-US"/>
+              <a:rPr lang="en-US" dirty="0"/>
               <a:t>Add design sources (First copy the files from host to VM)</a:t>
             </a:r>
           </a:p>
@@ -6685,7 +6687,7 @@
           <a:lstStyle/>
           <a:p>
             <a:r>
-              <a:rPr lang="en-US"/>
+              <a:rPr lang="en-US" dirty="0"/>
               <a:t>Run a simple case to verify the simulation and synthesis function</a:t>
             </a:r>
           </a:p>
@@ -6716,13 +6718,13 @@
               <a:buNone/>
             </a:pPr>
             <a:r>
-              <a:rPr lang="en-US" altLang="zh-CN" b="1"/>
+              <a:rPr lang="en-US" altLang="zh-CN" b="1" dirty="0"/>
               <a:t>Add files</a:t>
             </a:r>
           </a:p>
           <a:p>
             <a:r>
-              <a:rPr lang="en-US"/>
+              <a:rPr lang="en-US" dirty="0"/>
               <a:t>Add testbench</a:t>
             </a:r>
           </a:p>
@@ -7450,7 +7452,7 @@
           <a:lstStyle/>
           <a:p>
             <a:r>
-              <a:rPr lang="en-US"/>
+              <a:rPr lang="en-US" dirty="0"/>
               <a:t>Run a simple case to verify the simulation and synthesis function</a:t>
             </a:r>
           </a:p>
@@ -7481,13 +7483,13 @@
               <a:buNone/>
             </a:pPr>
             <a:r>
-              <a:rPr lang="en-US" altLang="zh-CN" b="1"/>
+              <a:rPr lang="en-US" altLang="zh-CN" b="1" dirty="0"/>
               <a:t>Add files</a:t>
             </a:r>
           </a:p>
           <a:p>
             <a:r>
-              <a:rPr lang="en-US"/>
+              <a:rPr lang="en-US" dirty="0"/>
               <a:t>Add testbench</a:t>
             </a:r>
           </a:p>
@@ -8101,7 +8103,7 @@
           <a:lstStyle/>
           <a:p>
             <a:r>
-              <a:rPr lang="en-US"/>
+              <a:rPr lang="en-US" dirty="0"/>
               <a:t>Run a simple case to verify the simulation and synthesis function</a:t>
             </a:r>
           </a:p>
@@ -8132,7 +8134,7 @@
               <a:buNone/>
             </a:pPr>
             <a:r>
-              <a:rPr lang="en-US" altLang="zh-CN" b="1"/>
+              <a:rPr lang="en-US" altLang="zh-CN" b="1" dirty="0"/>
               <a:t>Run simulation</a:t>
             </a:r>
           </a:p>
@@ -8767,7 +8769,7 @@
               <a:buNone/>
             </a:pPr>
             <a:r>
-              <a:rPr lang="en-US" altLang="zh-CN" b="1">
+              <a:rPr lang="en-US" altLang="zh-CN" b="1" dirty="0">
                 <a:solidFill>
                   <a:srgbClr val="FF0000"/>
                 </a:solidFill>
@@ -8974,7 +8976,7 @@
               <a:buNone/>
             </a:pPr>
             <a:r>
-              <a:rPr lang="en-US" altLang="zh-CN" b="1">
+              <a:rPr lang="en-US" altLang="zh-CN" b="1" dirty="0">
                 <a:solidFill>
                   <a:srgbClr val="FF0000"/>
                 </a:solidFill>
@@ -9181,7 +9183,7 @@
               <a:buNone/>
             </a:pPr>
             <a:r>
-              <a:rPr lang="en-US" altLang="zh-CN" b="1">
+              <a:rPr lang="en-US" altLang="zh-CN" b="1" dirty="0">
                 <a:solidFill>
                   <a:srgbClr val="FF0000"/>
                 </a:solidFill>
@@ -9256,7 +9258,7 @@
           <a:lstStyle/>
           <a:p>
             <a:r>
-              <a:rPr lang="en-US"/>
+              <a:rPr lang="en-US" dirty="0"/>
               <a:t>Run a simple case to verify the simulation and synthesis function</a:t>
             </a:r>
           </a:p>
@@ -9287,7 +9289,7 @@
               <a:buNone/>
             </a:pPr>
             <a:r>
-              <a:rPr lang="en-US" altLang="zh-CN" b="1"/>
+              <a:rPr lang="en-US" altLang="zh-CN" b="1" dirty="0"/>
               <a:t>Run simulation</a:t>
             </a:r>
           </a:p>
@@ -10096,7 +10098,7 @@
               <a:buNone/>
             </a:pPr>
             <a:r>
-              <a:rPr lang="en-US" altLang="zh-CN" b="1">
+              <a:rPr lang="en-US" altLang="zh-CN" b="1" dirty="0">
                 <a:solidFill>
                   <a:srgbClr val="FF0000"/>
                 </a:solidFill>
@@ -10171,7 +10173,7 @@
           <a:lstStyle/>
           <a:p>
             <a:r>
-              <a:rPr lang="en-US"/>
+              <a:rPr lang="en-US" dirty="0"/>
               <a:t>Run a simple case to verify the simulation and synthesis function</a:t>
             </a:r>
           </a:p>
@@ -10202,20 +10204,20 @@
               <a:buNone/>
             </a:pPr>
             <a:r>
-              <a:rPr lang="en-US" altLang="zh-CN" b="1"/>
+              <a:rPr lang="en-US" altLang="zh-CN" b="1" dirty="0"/>
               <a:t>Run synthesis</a:t>
             </a:r>
           </a:p>
           <a:p>
             <a:r>
-              <a:rPr lang="en-US"/>
+              <a:rPr lang="en-US" dirty="0"/>
               <a:t>Create </a:t>
             </a:r>
             <a:r>
-              <a:rPr lang="en-US" altLang="zh-CN"/>
+              <a:rPr lang="en-US" altLang="zh-CN" dirty="0"/>
               <a:t>clock constraints</a:t>
             </a:r>
-            <a:endParaRPr lang="en-US"/>
+            <a:endParaRPr lang="en-US" dirty="0"/>
           </a:p>
         </p:txBody>
       </p:sp>
@@ -10778,7 +10780,7 @@
           <a:lstStyle/>
           <a:p>
             <a:r>
-              <a:rPr lang="en-US"/>
+              <a:rPr lang="en-US" dirty="0"/>
               <a:t>Objectives</a:t>
             </a:r>
           </a:p>
@@ -10808,35 +10810,35 @@
               <a:buNone/>
             </a:pPr>
             <a:r>
-              <a:rPr lang="en-US" sz="2800"/>
+              <a:rPr lang="en-US" sz="2800" dirty="0"/>
               <a:t>In this lab, you will </a:t>
             </a:r>
           </a:p>
           <a:p>
             <a:pPr lvl="1"/>
             <a:r>
-              <a:rPr lang="en-US" sz="2800"/>
+              <a:rPr lang="en-US" sz="2800" dirty="0"/>
               <a:t>Import the experimental tool development kit (including the Xilinx Vitis, </a:t>
             </a:r>
             <a:r>
-              <a:rPr lang="en-US" sz="2800" err="1"/>
+              <a:rPr lang="en-US" sz="2800" dirty="0" err="1"/>
               <a:t>GTKWave</a:t>
             </a:r>
             <a:r>
-              <a:rPr lang="en-US" sz="2800"/>
+              <a:rPr lang="en-US" sz="2800" dirty="0"/>
               <a:t>, RISC-V GCC Toolchains) into your virtual machine.</a:t>
             </a:r>
           </a:p>
           <a:p>
             <a:pPr lvl="1"/>
             <a:r>
-              <a:rPr lang="en-US" sz="2800"/>
+              <a:rPr lang="en-US" sz="2800" dirty="0"/>
               <a:t>Run a simple case to verify the simulation and synthesis function.</a:t>
             </a:r>
           </a:p>
           <a:p>
             <a:pPr lvl="1"/>
-            <a:endParaRPr lang="en-US" sz="2000"/>
+            <a:endParaRPr lang="en-US" sz="2000" dirty="0"/>
           </a:p>
         </p:txBody>
       </p:sp>
@@ -10905,7 +10907,7 @@
           <a:lstStyle/>
           <a:p>
             <a:r>
-              <a:rPr lang="en-US"/>
+              <a:rPr lang="en-US" dirty="0"/>
               <a:t>Run a simple case to verify the simulation and synthesis function</a:t>
             </a:r>
           </a:p>
@@ -10936,20 +10938,20 @@
               <a:buNone/>
             </a:pPr>
             <a:r>
-              <a:rPr lang="en-US" altLang="zh-CN" b="1"/>
+              <a:rPr lang="en-US" altLang="zh-CN" b="1" dirty="0"/>
               <a:t>Run synthesis</a:t>
             </a:r>
           </a:p>
           <a:p>
             <a:r>
-              <a:rPr lang="en-US"/>
+              <a:rPr lang="en-US" dirty="0"/>
               <a:t>Create </a:t>
             </a:r>
             <a:r>
-              <a:rPr lang="en-US" altLang="zh-CN"/>
+              <a:rPr lang="en-US" altLang="zh-CN" dirty="0"/>
               <a:t>clock constraints</a:t>
             </a:r>
-            <a:endParaRPr lang="en-US"/>
+            <a:endParaRPr lang="en-US" dirty="0"/>
           </a:p>
         </p:txBody>
       </p:sp>
@@ -11540,7 +11542,7 @@
           <a:lstStyle/>
           <a:p>
             <a:r>
-              <a:rPr lang="en-US"/>
+              <a:rPr lang="en-US" dirty="0"/>
               <a:t>Run a simple case to verify the simulation and synthesis function</a:t>
             </a:r>
           </a:p>
@@ -11571,20 +11573,20 @@
               <a:buNone/>
             </a:pPr>
             <a:r>
-              <a:rPr lang="en-US" altLang="zh-CN" b="1"/>
+              <a:rPr lang="en-US" altLang="zh-CN" b="1" dirty="0"/>
               <a:t>Run synthesis</a:t>
             </a:r>
           </a:p>
           <a:p>
             <a:r>
-              <a:rPr lang="en-US"/>
+              <a:rPr lang="en-US" dirty="0"/>
               <a:t>Create </a:t>
             </a:r>
             <a:r>
-              <a:rPr lang="en-US" altLang="zh-CN"/>
+              <a:rPr lang="en-US" altLang="zh-CN" dirty="0"/>
               <a:t>clock constraints</a:t>
             </a:r>
-            <a:endParaRPr lang="en-US"/>
+            <a:endParaRPr lang="en-US" dirty="0"/>
           </a:p>
         </p:txBody>
       </p:sp>
@@ -11941,7 +11943,7 @@
           <a:lstStyle/>
           <a:p>
             <a:r>
-              <a:rPr lang="en-US"/>
+              <a:rPr lang="en-US" dirty="0"/>
               <a:t>Run a simple case to verify the simulation and synthesis function</a:t>
             </a:r>
           </a:p>
@@ -11972,15 +11974,20 @@
               <a:buNone/>
             </a:pPr>
             <a:r>
-              <a:rPr lang="en-US" altLang="zh-CN" b="1"/>
+              <a:rPr lang="en-US" altLang="zh-CN" b="1" dirty="0"/>
               <a:t>Run synthesis</a:t>
             </a:r>
           </a:p>
           <a:p>
             <a:r>
+              <a:rPr lang="en-US" dirty="0"/>
+              <a:t>Run synthesis (It takes some time…</a:t>
+            </a:r>
+            <a:r>
               <a:rPr lang="en-US"/>
-              <a:t>Run synthesis (It takes some time…Please wait…)</a:t>
-            </a:r>
+              <a:t>Please wait…)</a:t>
+            </a:r>
+            <a:endParaRPr lang="en-US" dirty="0"/>
           </a:p>
         </p:txBody>
       </p:sp>
@@ -12715,7 +12722,7 @@
           <a:lstStyle/>
           <a:p>
             <a:r>
-              <a:rPr lang="en-US"/>
+              <a:rPr lang="en-US" dirty="0"/>
               <a:t>Run a simple case to verify the simulation and synthesis function</a:t>
             </a:r>
           </a:p>
@@ -12746,13 +12753,13 @@
               <a:buNone/>
             </a:pPr>
             <a:r>
-              <a:rPr lang="en-US" altLang="zh-CN" b="1"/>
+              <a:rPr lang="en-US" altLang="zh-CN" b="1" dirty="0"/>
               <a:t>Run synthesis</a:t>
             </a:r>
           </a:p>
           <a:p>
             <a:r>
-              <a:rPr lang="en-US"/>
+              <a:rPr lang="en-US" dirty="0"/>
               <a:t>Report timing</a:t>
             </a:r>
           </a:p>
@@ -13354,7 +13361,7 @@
               <a:buNone/>
             </a:pPr>
             <a:r>
-              <a:rPr lang="en-US" altLang="zh-CN" b="1">
+              <a:rPr lang="en-US" altLang="zh-CN" b="1" dirty="0">
                 <a:solidFill>
                   <a:srgbClr val="FF0000"/>
                 </a:solidFill>
@@ -13561,7 +13568,7 @@
               <a:buNone/>
             </a:pPr>
             <a:r>
-              <a:rPr lang="en-US" altLang="zh-CN" b="1">
+              <a:rPr lang="en-US" altLang="zh-CN" b="1" dirty="0">
                 <a:solidFill>
                   <a:srgbClr val="FF0000"/>
                 </a:solidFill>
@@ -13768,7 +13775,7 @@
               <a:buNone/>
             </a:pPr>
             <a:r>
-              <a:rPr lang="en-US" altLang="zh-CN" b="1">
+              <a:rPr lang="en-US" altLang="zh-CN" b="1" dirty="0">
                 <a:solidFill>
                   <a:srgbClr val="FF0000"/>
                 </a:solidFill>
@@ -13975,7 +13982,7 @@
               <a:buNone/>
             </a:pPr>
             <a:r>
-              <a:rPr lang="en-US" altLang="zh-CN" b="1">
+              <a:rPr lang="en-US" altLang="zh-CN" b="1" dirty="0">
                 <a:solidFill>
                   <a:srgbClr val="FF0000"/>
                 </a:solidFill>
@@ -13983,7 +13990,7 @@
               <a:t>Since no </a:t>
             </a:r>
             <a:r>
-              <a:rPr lang="en-US" altLang="zh-CN" b="1" err="1">
+              <a:rPr lang="en-US" altLang="zh-CN" b="1" dirty="0" err="1">
                 <a:solidFill>
                   <a:srgbClr val="FF0000"/>
                 </a:solidFill>
@@ -13991,7 +13998,7 @@
               <a:t>clk</a:t>
             </a:r>
             <a:r>
-              <a:rPr lang="en-US" altLang="zh-CN" b="1">
+              <a:rPr lang="en-US" altLang="zh-CN" b="1" dirty="0">
                 <a:solidFill>
                   <a:srgbClr val="FF0000"/>
                 </a:solidFill>
@@ -14096,7 +14103,7 @@
           <a:lstStyle/>
           <a:p>
             <a:r>
-              <a:rPr lang="en-US"/>
+              <a:rPr lang="en-US" dirty="0"/>
               <a:t>Run a simple case to verify the simulation and synthesis function</a:t>
             </a:r>
           </a:p>
@@ -14127,13 +14134,13 @@
               <a:buNone/>
             </a:pPr>
             <a:r>
-              <a:rPr lang="en-US" altLang="zh-CN" b="1"/>
+              <a:rPr lang="en-US" altLang="zh-CN" b="1" dirty="0"/>
               <a:t>Run synthesis</a:t>
             </a:r>
           </a:p>
           <a:p>
             <a:r>
-              <a:rPr lang="en-US"/>
+              <a:rPr lang="en-US" dirty="0"/>
               <a:t>Report utilization</a:t>
             </a:r>
           </a:p>
@@ -14510,7 +14517,7 @@
               <a:buNone/>
             </a:pPr>
             <a:r>
-              <a:rPr lang="en-US" altLang="zh-CN" b="1">
+              <a:rPr lang="en-US" altLang="zh-CN" b="1" dirty="0">
                 <a:solidFill>
                   <a:srgbClr val="FF0000"/>
                 </a:solidFill>
@@ -14717,7 +14724,7 @@
               <a:buNone/>
             </a:pPr>
             <a:r>
-              <a:rPr lang="en-US" altLang="zh-CN" b="1">
+              <a:rPr lang="en-US" altLang="zh-CN" b="1" dirty="0">
                 <a:solidFill>
                   <a:srgbClr val="FF0000"/>
                 </a:solidFill>
@@ -14954,7 +14961,7 @@
               <a:buNone/>
             </a:pPr>
             <a:r>
-              <a:rPr lang="en-US" altLang="zh-CN" b="1">
+              <a:rPr lang="en-US" altLang="zh-CN" b="1" dirty="0">
                 <a:solidFill>
                   <a:srgbClr val="FF0000"/>
                 </a:solidFill>
@@ -15305,7 +15312,7 @@
               <a:buNone/>
             </a:pPr>
             <a:r>
-              <a:rPr lang="en-US" altLang="zh-CN" b="1">
+              <a:rPr lang="en-US" altLang="zh-CN" b="1" dirty="0">
                 <a:solidFill>
                   <a:srgbClr val="FF0000"/>
                 </a:solidFill>
@@ -15361,10 +15368,10 @@
           <a:lstStyle/>
           <a:p>
             <a:r>
-              <a:rPr lang="en-US" altLang="zh-CN"/>
+              <a:rPr lang="en-US" altLang="zh-CN" dirty="0"/>
               <a:t>Submission</a:t>
             </a:r>
-            <a:endParaRPr lang="en-US"/>
+            <a:endParaRPr lang="en-US" dirty="0"/>
           </a:p>
         </p:txBody>
       </p:sp>
@@ -15398,63 +15405,63 @@
               <a:buNone/>
             </a:pPr>
             <a:r>
-              <a:rPr lang="en-US" altLang="zh-CN" b="1"/>
+              <a:rPr lang="en-US" altLang="zh-CN" b="1" dirty="0"/>
               <a:t>Submit to </a:t>
             </a:r>
             <a:r>
-              <a:rPr lang="en-US" altLang="zh-CN" b="1" err="1"/>
+              <a:rPr lang="en-US" altLang="zh-CN" b="1" dirty="0" err="1"/>
               <a:t>HackMD</a:t>
             </a:r>
             <a:r>
-              <a:rPr lang="en-US" altLang="zh-CN" b="1"/>
+              <a:rPr lang="en-US" altLang="zh-CN" b="1" dirty="0"/>
               <a:t>.</a:t>
             </a:r>
           </a:p>
           <a:p>
             <a:r>
-              <a:rPr lang="en-US"/>
+              <a:rPr lang="en-US" dirty="0"/>
               <a:t>Simulation success screenshot</a:t>
             </a:r>
           </a:p>
           <a:p>
             <a:r>
-              <a:rPr lang="en-US" altLang="zh-CN"/>
+              <a:rPr lang="en-US" altLang="zh-CN" dirty="0"/>
               <a:t>Synthesis success screenshot</a:t>
             </a:r>
-            <a:endParaRPr lang="en-US" altLang="zh-CN" b="1"/>
+            <a:endParaRPr lang="en-US" altLang="zh-CN" b="1" dirty="0"/>
           </a:p>
           <a:p>
             <a:pPr marL="0" indent="0">
               <a:buNone/>
             </a:pPr>
             <a:r>
-              <a:rPr lang="en-US" altLang="zh-CN" b="1"/>
+              <a:rPr lang="en-US" altLang="zh-CN" b="1" dirty="0"/>
               <a:t>Submit to GitHub.</a:t>
             </a:r>
           </a:p>
           <a:p>
             <a:pPr fontAlgn="base"/>
             <a:r>
-              <a:rPr lang="en-HK"/>
+              <a:rPr lang="en-HK" dirty="0"/>
               <a:t>Create your repository. In your lab1 folder, please include:</a:t>
             </a:r>
           </a:p>
           <a:p>
             <a:pPr lvl="1" fontAlgn="base"/>
             <a:r>
-              <a:rPr lang="en-HK">
+              <a:rPr lang="en-HK" dirty="0">
                 <a:effectLst/>
               </a:rPr>
               <a:t>/</a:t>
             </a:r>
             <a:r>
-              <a:rPr lang="en-HK" err="1">
+              <a:rPr lang="en-HK" dirty="0" err="1">
                 <a:effectLst/>
               </a:rPr>
               <a:t>src</a:t>
             </a:r>
             <a:r>
-              <a:rPr lang="en-HK">
+              <a:rPr lang="en-HK" dirty="0">
                 <a:effectLst/>
               </a:rPr>
               <a:t> - design sources, .v, tb</a:t>
@@ -15463,23 +15470,43 @@
           <a:p>
             <a:pPr lvl="1" fontAlgn="base"/>
             <a:r>
-              <a:rPr lang="en-HK">
+              <a:rPr lang="en-HK" dirty="0">
                 <a:effectLst/>
               </a:rPr>
               <a:t>/report - </a:t>
             </a:r>
             <a:r>
-              <a:rPr lang="en-HK" err="1">
+              <a:rPr lang="en-HK" dirty="0" err="1">
                 <a:effectLst/>
               </a:rPr>
               <a:t>rtl</a:t>
             </a:r>
             <a:r>
-              <a:rPr lang="en-HK">
+              <a:rPr lang="en-HK" dirty="0">
                 <a:effectLst/>
               </a:rPr>
               <a:t> simulation log, synthesis log/resource, timing report</a:t>
             </a:r>
+          </a:p>
+          <a:p>
+            <a:pPr lvl="1" fontAlgn="base"/>
+            <a:endParaRPr lang="en-HK" dirty="0"/>
+          </a:p>
+          <a:p>
+            <a:pPr marL="0" indent="0" fontAlgn="base">
+              <a:buNone/>
+            </a:pPr>
+            <a:r>
+              <a:rPr lang="en-US" altLang="zh-CN" b="1"/>
+              <a:t>Due Date: 23:59PM, Feb 9</a:t>
+            </a:r>
+            <a:endParaRPr lang="en-US" altLang="zh-CN" b="1" dirty="0"/>
+          </a:p>
+          <a:p>
+            <a:pPr fontAlgn="base"/>
+            <a:endParaRPr lang="en-HK" dirty="0">
+              <a:effectLst/>
+            </a:endParaRPr>
           </a:p>
         </p:txBody>
       </p:sp>
@@ -15541,7 +15568,7 @@
           <a:lstStyle/>
           <a:p>
             <a:r>
-              <a:rPr lang="en-US"/>
+              <a:rPr lang="en-US" dirty="0"/>
               <a:t>Needed files</a:t>
             </a:r>
           </a:p>
@@ -15571,204 +15598,204 @@
           <a:lstStyle/>
           <a:p>
             <a:r>
-              <a:rPr lang="en-US"/>
+              <a:rPr lang="en-US" dirty="0"/>
               <a:t>Vitis VM folder: (copy from TAs)</a:t>
             </a:r>
           </a:p>
           <a:p>
             <a:pPr lvl="1"/>
             <a:r>
-              <a:rPr lang="en-US" altLang="zh-CN"/>
+              <a:rPr lang="en-US" altLang="zh-CN" dirty="0"/>
               <a:t>Experimental tool development kit zip files</a:t>
             </a:r>
           </a:p>
           <a:p>
             <a:pPr lvl="1"/>
             <a:r>
-              <a:rPr lang="en-US"/>
+              <a:rPr lang="en-US" dirty="0"/>
               <a:t>User guide</a:t>
             </a:r>
           </a:p>
           <a:p>
             <a:pPr lvl="1"/>
             <a:r>
-              <a:rPr lang="en-US"/>
+              <a:rPr lang="en-US" dirty="0"/>
               <a:t>Note</a:t>
             </a:r>
             <a:r>
-              <a:rPr lang="en-US" altLang="zh-CN"/>
+              <a:rPr lang="en-US" altLang="zh-CN" dirty="0"/>
               <a:t>:</a:t>
             </a:r>
             <a:r>
-              <a:rPr lang="zh-CN" altLang="en-US"/>
+              <a:rPr lang="zh-CN" altLang="en-US" dirty="0"/>
               <a:t> </a:t>
             </a:r>
             <a:r>
-              <a:rPr lang="en-US" altLang="zh-CN"/>
+              <a:rPr lang="en-US" altLang="zh-CN" dirty="0"/>
               <a:t>The</a:t>
             </a:r>
             <a:r>
-              <a:rPr lang="zh-CN" altLang="en-US"/>
+              <a:rPr lang="zh-CN" altLang="en-US" dirty="0"/>
               <a:t> </a:t>
             </a:r>
             <a:r>
-              <a:rPr lang="en-US" altLang="zh-CN"/>
+              <a:rPr lang="en-US" altLang="zh-CN" dirty="0"/>
               <a:t>unzip</a:t>
             </a:r>
             <a:r>
-              <a:rPr lang="zh-CN" altLang="en-US"/>
+              <a:rPr lang="zh-CN" altLang="en-US" dirty="0"/>
               <a:t> </a:t>
             </a:r>
             <a:r>
-              <a:rPr lang="en-US" altLang="zh-CN"/>
+              <a:rPr lang="en-US" altLang="zh-CN" dirty="0"/>
               <a:t>files</a:t>
             </a:r>
             <a:r>
-              <a:rPr lang="zh-CN" altLang="en-US"/>
+              <a:rPr lang="zh-CN" altLang="en-US" dirty="0"/>
               <a:t> </a:t>
             </a:r>
             <a:r>
-              <a:rPr lang="en-US" altLang="zh-CN"/>
+              <a:rPr lang="en-US" altLang="zh-CN" dirty="0"/>
               <a:t>have</a:t>
             </a:r>
             <a:r>
-              <a:rPr lang="zh-CN" altLang="en-US"/>
+              <a:rPr lang="zh-CN" altLang="en-US" dirty="0"/>
               <a:t> </a:t>
             </a:r>
             <a:r>
-              <a:rPr lang="en-US" altLang="zh-CN"/>
+              <a:rPr lang="en-US" altLang="zh-CN" dirty="0"/>
               <a:t>a</a:t>
             </a:r>
             <a:r>
-              <a:rPr lang="zh-CN" altLang="en-US"/>
+              <a:rPr lang="zh-CN" altLang="en-US" dirty="0"/>
               <a:t> </a:t>
             </a:r>
             <a:r>
-              <a:rPr lang="en-US" altLang="zh-CN"/>
+              <a:rPr lang="en-US" altLang="zh-CN" dirty="0"/>
               <a:t>size</a:t>
             </a:r>
             <a:r>
-              <a:rPr lang="zh-CN" altLang="en-US"/>
+              <a:rPr lang="zh-CN" altLang="en-US" dirty="0"/>
               <a:t> </a:t>
             </a:r>
             <a:r>
-              <a:rPr lang="en-US" altLang="zh-CN"/>
+              <a:rPr lang="en-US" altLang="zh-CN" dirty="0"/>
               <a:t>of</a:t>
             </a:r>
             <a:r>
-              <a:rPr lang="zh-CN" altLang="en-US"/>
+              <a:rPr lang="zh-CN" altLang="en-US" dirty="0"/>
               <a:t> </a:t>
             </a:r>
             <a:r>
-              <a:rPr lang="en-US" altLang="zh-CN"/>
+              <a:rPr lang="en-US" altLang="zh-CN" dirty="0"/>
               <a:t>over</a:t>
             </a:r>
             <a:r>
-              <a:rPr lang="zh-CN" altLang="en-US"/>
+              <a:rPr lang="zh-CN" altLang="en-US" dirty="0"/>
               <a:t> </a:t>
             </a:r>
             <a:r>
-              <a:rPr lang="en-US" altLang="zh-CN"/>
+              <a:rPr lang="en-US" altLang="zh-CN" dirty="0"/>
               <a:t>200GB,</a:t>
             </a:r>
             <a:r>
-              <a:rPr lang="zh-CN" altLang="en-US"/>
+              <a:rPr lang="zh-CN" altLang="en-US" dirty="0"/>
               <a:t> </a:t>
             </a:r>
             <a:r>
-              <a:rPr lang="en-US" altLang="zh-CN"/>
+              <a:rPr lang="en-US" altLang="zh-CN" dirty="0"/>
               <a:t>please</a:t>
             </a:r>
             <a:r>
-              <a:rPr lang="zh-CN" altLang="en-US"/>
+              <a:rPr lang="zh-CN" altLang="en-US" dirty="0"/>
               <a:t> </a:t>
             </a:r>
             <a:r>
-              <a:rPr lang="en-US" altLang="zh-CN"/>
+              <a:rPr lang="en-US" altLang="zh-CN" dirty="0"/>
               <a:t>make</a:t>
             </a:r>
             <a:r>
-              <a:rPr lang="zh-CN" altLang="en-US"/>
+              <a:rPr lang="zh-CN" altLang="en-US" dirty="0"/>
               <a:t> </a:t>
             </a:r>
             <a:r>
-              <a:rPr lang="en-US" altLang="zh-CN"/>
+              <a:rPr lang="en-US" altLang="zh-CN" dirty="0"/>
               <a:t>sure</a:t>
             </a:r>
             <a:r>
-              <a:rPr lang="zh-CN" altLang="en-US"/>
+              <a:rPr lang="zh-CN" altLang="en-US" dirty="0"/>
               <a:t> </a:t>
             </a:r>
             <a:r>
-              <a:rPr lang="en-US" altLang="zh-CN"/>
+              <a:rPr lang="en-US" altLang="zh-CN" dirty="0"/>
               <a:t>you</a:t>
             </a:r>
             <a:r>
-              <a:rPr lang="zh-CN" altLang="en-US"/>
+              <a:rPr lang="zh-CN" altLang="en-US" dirty="0"/>
               <a:t> </a:t>
             </a:r>
             <a:r>
-              <a:rPr lang="en-US" altLang="zh-CN"/>
+              <a:rPr lang="en-US" altLang="zh-CN" dirty="0"/>
               <a:t>have</a:t>
             </a:r>
             <a:r>
-              <a:rPr lang="zh-CN" altLang="en-US"/>
+              <a:rPr lang="zh-CN" altLang="en-US" dirty="0"/>
               <a:t> </a:t>
             </a:r>
             <a:r>
-              <a:rPr lang="en-US" altLang="zh-CN"/>
+              <a:rPr lang="en-US" altLang="zh-CN" dirty="0"/>
               <a:t>enough</a:t>
             </a:r>
             <a:r>
-              <a:rPr lang="zh-CN" altLang="en-US"/>
+              <a:rPr lang="zh-CN" altLang="en-US" dirty="0"/>
               <a:t> </a:t>
             </a:r>
             <a:r>
-              <a:rPr lang="en-US" altLang="zh-CN"/>
+              <a:rPr lang="en-US" altLang="zh-CN" dirty="0"/>
               <a:t>space.</a:t>
             </a:r>
-            <a:endParaRPr lang="en-US"/>
-          </a:p>
-          <a:p>
-            <a:r>
-              <a:rPr lang="en-US"/>
+            <a:endParaRPr lang="en-US" dirty="0"/>
+          </a:p>
+          <a:p>
+            <a:r>
+              <a:rPr lang="en-US" dirty="0"/>
               <a:t>Verilog folder: (</a:t>
             </a:r>
             <a:r>
-              <a:rPr lang="en-US">
+              <a:rPr lang="en-US" dirty="0">
                 <a:hlinkClick r:id="rId2"/>
               </a:rPr>
               <a:t>https://github.com/roo-nju/hkust-soc-lab/tree/main/Lab1/Verilog</a:t>
             </a:r>
             <a:r>
-              <a:rPr lang="en-US"/>
+              <a:rPr lang="en-US" dirty="0"/>
               <a:t>)</a:t>
             </a:r>
           </a:p>
           <a:p>
             <a:pPr lvl="1"/>
             <a:r>
-              <a:rPr lang="en-US"/>
+              <a:rPr lang="en-US" dirty="0"/>
               <a:t>Design file</a:t>
             </a:r>
           </a:p>
           <a:p>
             <a:pPr lvl="1"/>
             <a:r>
-              <a:rPr lang="en-US"/>
+              <a:rPr lang="en-US" dirty="0"/>
               <a:t>Simulation file</a:t>
             </a:r>
           </a:p>
           <a:p>
             <a:pPr lvl="1"/>
             <a:r>
-              <a:rPr lang="en-US"/>
+              <a:rPr lang="en-US" dirty="0"/>
               <a:t>Test data</a:t>
             </a:r>
           </a:p>
           <a:p>
             <a:pPr lvl="1"/>
-            <a:endParaRPr lang="en-US" sz="2000"/>
+            <a:endParaRPr lang="en-US" sz="2000" dirty="0"/>
           </a:p>
         </p:txBody>
       </p:sp>
@@ -15825,7 +15852,7 @@
           <a:lstStyle/>
           <a:p>
             <a:r>
-              <a:rPr lang="en-US"/>
+              <a:rPr lang="en-US" dirty="0"/>
               <a:t>Import the experimental tool development kit to virtual machine</a:t>
             </a:r>
           </a:p>
@@ -15850,7 +15877,7 @@
               <a:buNone/>
             </a:pPr>
             <a:r>
-              <a:rPr lang="en-US" b="1"/>
+              <a:rPr lang="en-US" b="1" dirty="0"/>
               <a:t>Refer to the user guide in the Vitis VM folder</a:t>
             </a:r>
           </a:p>
@@ -15858,7 +15885,7 @@
             <a:pPr marL="0" indent="0">
               <a:buNone/>
             </a:pPr>
-            <a:endParaRPr lang="en-US"/>
+            <a:endParaRPr lang="en-US" dirty="0"/>
           </a:p>
         </p:txBody>
       </p:sp>
@@ -16039,7 +16066,7 @@
           <a:lstStyle/>
           <a:p>
             <a:r>
-              <a:rPr lang="en-US"/>
+              <a:rPr lang="en-US" dirty="0"/>
               <a:t>Run a simple case to verify the simulation and synthesis function</a:t>
             </a:r>
           </a:p>
@@ -16070,13 +16097,13 @@
               <a:buNone/>
             </a:pPr>
             <a:r>
-              <a:rPr lang="en-US" altLang="zh-CN" b="1"/>
+              <a:rPr lang="en-US" altLang="zh-CN" b="1" dirty="0"/>
               <a:t>Create a new project</a:t>
             </a:r>
           </a:p>
           <a:p>
             <a:r>
-              <a:rPr lang="en-US"/>
+              <a:rPr lang="en-US" dirty="0"/>
               <a:t>Open the vivado</a:t>
             </a:r>
           </a:p>
@@ -16177,7 +16204,7 @@
           <a:lstStyle/>
           <a:p>
             <a:r>
-              <a:rPr lang="en-US"/>
+              <a:rPr lang="en-US" dirty="0"/>
               <a:t>Run a simple case to verify the simulation and synthesis function</a:t>
             </a:r>
           </a:p>
@@ -16208,13 +16235,13 @@
               <a:buNone/>
             </a:pPr>
             <a:r>
-              <a:rPr lang="en-US" altLang="zh-CN" b="1"/>
+              <a:rPr lang="en-US" altLang="zh-CN" b="1" dirty="0"/>
               <a:t>Create a new project</a:t>
             </a:r>
           </a:p>
           <a:p>
             <a:r>
-              <a:rPr lang="en-US"/>
+              <a:rPr lang="en-US" dirty="0"/>
               <a:t>Create project</a:t>
             </a:r>
           </a:p>
@@ -16480,7 +16507,7 @@
           <a:lstStyle/>
           <a:p>
             <a:r>
-              <a:rPr lang="en-US"/>
+              <a:rPr lang="en-US" dirty="0"/>
               <a:t>Run a simple case to verify the simulation and synthesis function</a:t>
             </a:r>
           </a:p>
@@ -16511,13 +16538,13 @@
               <a:buNone/>
             </a:pPr>
             <a:r>
-              <a:rPr lang="en-US" altLang="zh-CN" b="1"/>
+              <a:rPr lang="en-US" altLang="zh-CN" b="1" dirty="0"/>
               <a:t>Create a new project</a:t>
             </a:r>
           </a:p>
           <a:p>
             <a:r>
-              <a:rPr lang="en-US"/>
+              <a:rPr lang="en-US" dirty="0"/>
               <a:t>Create project</a:t>
             </a:r>
           </a:p>
@@ -16762,7 +16789,7 @@
           <a:lstStyle/>
           <a:p>
             <a:r>
-              <a:rPr lang="en-US"/>
+              <a:rPr lang="en-US" dirty="0"/>
               <a:t>Run a simple case to verify the simulation and synthesis function</a:t>
             </a:r>
           </a:p>
@@ -16793,13 +16820,13 @@
               <a:buNone/>
             </a:pPr>
             <a:r>
-              <a:rPr lang="en-US" altLang="zh-CN" b="1"/>
+              <a:rPr lang="en-US" altLang="zh-CN" b="1" dirty="0"/>
               <a:t>Create a new project</a:t>
             </a:r>
           </a:p>
           <a:p>
             <a:r>
-              <a:rPr lang="en-US"/>
+              <a:rPr lang="en-US" dirty="0"/>
               <a:t>Select RTL project</a:t>
             </a:r>
           </a:p>
@@ -17209,7 +17236,7 @@
           <a:lstStyle/>
           <a:p>
             <a:r>
-              <a:rPr lang="en-US"/>
+              <a:rPr lang="en-US" dirty="0"/>
               <a:t>Run a simple case to verify the simulation and synthesis function</a:t>
             </a:r>
           </a:p>
@@ -17240,13 +17267,13 @@
               <a:buNone/>
             </a:pPr>
             <a:r>
-              <a:rPr lang="en-US" altLang="zh-CN" b="1"/>
+              <a:rPr lang="en-US" altLang="zh-CN" b="1" dirty="0"/>
               <a:t>Create a new project</a:t>
             </a:r>
           </a:p>
           <a:p>
             <a:r>
-              <a:rPr lang="en-US"/>
+              <a:rPr lang="en-US" dirty="0"/>
               <a:t>Add sources</a:t>
             </a:r>
           </a:p>
@@ -17644,7 +17671,7 @@
               <a:buNone/>
             </a:pPr>
             <a:r>
-              <a:rPr lang="en-US" altLang="zh-CN" b="1">
+              <a:rPr lang="en-US" altLang="zh-CN" b="1" dirty="0">
                 <a:solidFill>
                   <a:srgbClr val="FF0000"/>
                 </a:solidFill>
